--- a/probability_and_statistics/3_probability/probability-2-Rules-5-Bayes-Theorem.pptx
+++ b/probability_and_statistics/3_probability/probability-2-Rules-5-Bayes-Theorem.pptx
@@ -230,7 +230,7 @@
           <a:p>
             <a:fld id="{7BAEECA8-D063-486F-AE31-5020270C1449}" type="datetimeFigureOut">
               <a:rPr lang="en-US" smtClean="0"/>
-              <a:t>2/28/2026</a:t>
+              <a:t>4/29/2026</a:t>
             </a:fld>
             <a:endParaRPr lang="en-US"/>
           </a:p>
@@ -407,7 +407,7 @@
           <a:p>
             <a:fld id="{22B04693-6424-47C2-B763-AEA4CC3DEB22}" type="datetimeFigureOut">
               <a:rPr lang="en-US" smtClean="0"/>
-              <a:t>2/28/2026</a:t>
+              <a:t>4/29/2026</a:t>
             </a:fld>
             <a:endParaRPr lang="en-US"/>
           </a:p>
@@ -989,7 +989,7 @@
           <a:p>
             <a:fld id="{6383FAE1-13DE-4511-8C1B-C8AFB720664C}" type="datetimeFigureOut">
               <a:rPr lang="en-US" smtClean="0"/>
-              <a:t>2/28/2026</a:t>
+              <a:t>4/29/2026</a:t>
             </a:fld>
             <a:endParaRPr lang="en-US"/>
           </a:p>
@@ -1187,7 +1187,7 @@
           <a:p>
             <a:fld id="{6383FAE1-13DE-4511-8C1B-C8AFB720664C}" type="datetimeFigureOut">
               <a:rPr lang="en-US" smtClean="0"/>
-              <a:t>2/28/2026</a:t>
+              <a:t>4/29/2026</a:t>
             </a:fld>
             <a:endParaRPr lang="en-US"/>
           </a:p>
@@ -1395,7 +1395,7 @@
           <a:p>
             <a:fld id="{6383FAE1-13DE-4511-8C1B-C8AFB720664C}" type="datetimeFigureOut">
               <a:rPr lang="en-US" smtClean="0"/>
-              <a:t>2/28/2026</a:t>
+              <a:t>4/29/2026</a:t>
             </a:fld>
             <a:endParaRPr lang="en-US"/>
           </a:p>
@@ -1593,7 +1593,7 @@
           <a:p>
             <a:fld id="{6383FAE1-13DE-4511-8C1B-C8AFB720664C}" type="datetimeFigureOut">
               <a:rPr lang="en-US" smtClean="0"/>
-              <a:t>2/28/2026</a:t>
+              <a:t>4/29/2026</a:t>
             </a:fld>
             <a:endParaRPr lang="en-US"/>
           </a:p>
@@ -1868,7 +1868,7 @@
           <a:p>
             <a:fld id="{6383FAE1-13DE-4511-8C1B-C8AFB720664C}" type="datetimeFigureOut">
               <a:rPr lang="en-US" smtClean="0"/>
-              <a:t>2/28/2026</a:t>
+              <a:t>4/29/2026</a:t>
             </a:fld>
             <a:endParaRPr lang="en-US"/>
           </a:p>
@@ -2133,7 +2133,7 @@
           <a:p>
             <a:fld id="{6383FAE1-13DE-4511-8C1B-C8AFB720664C}" type="datetimeFigureOut">
               <a:rPr lang="en-US" smtClean="0"/>
-              <a:t>2/28/2026</a:t>
+              <a:t>4/29/2026</a:t>
             </a:fld>
             <a:endParaRPr lang="en-US"/>
           </a:p>
@@ -2545,7 +2545,7 @@
           <a:p>
             <a:fld id="{6383FAE1-13DE-4511-8C1B-C8AFB720664C}" type="datetimeFigureOut">
               <a:rPr lang="en-US" smtClean="0"/>
-              <a:t>2/28/2026</a:t>
+              <a:t>4/29/2026</a:t>
             </a:fld>
             <a:endParaRPr lang="en-US"/>
           </a:p>
@@ -2686,7 +2686,7 @@
           <a:p>
             <a:fld id="{6383FAE1-13DE-4511-8C1B-C8AFB720664C}" type="datetimeFigureOut">
               <a:rPr lang="en-US" smtClean="0"/>
-              <a:t>2/28/2026</a:t>
+              <a:t>4/29/2026</a:t>
             </a:fld>
             <a:endParaRPr lang="en-US"/>
           </a:p>
@@ -2799,7 +2799,7 @@
           <a:p>
             <a:fld id="{6383FAE1-13DE-4511-8C1B-C8AFB720664C}" type="datetimeFigureOut">
               <a:rPr lang="en-US" smtClean="0"/>
-              <a:t>2/28/2026</a:t>
+              <a:t>4/29/2026</a:t>
             </a:fld>
             <a:endParaRPr lang="en-US"/>
           </a:p>
@@ -3110,7 +3110,7 @@
           <a:p>
             <a:fld id="{6383FAE1-13DE-4511-8C1B-C8AFB720664C}" type="datetimeFigureOut">
               <a:rPr lang="en-US" smtClean="0"/>
-              <a:t>2/28/2026</a:t>
+              <a:t>4/29/2026</a:t>
             </a:fld>
             <a:endParaRPr lang="en-US"/>
           </a:p>
@@ -3401,7 +3401,7 @@
           <a:p>
             <a:fld id="{6383FAE1-13DE-4511-8C1B-C8AFB720664C}" type="datetimeFigureOut">
               <a:rPr lang="en-US" smtClean="0"/>
-              <a:t>2/28/2026</a:t>
+              <a:t>4/29/2026</a:t>
             </a:fld>
             <a:endParaRPr lang="en-US"/>
           </a:p>
@@ -3645,7 +3645,7 @@
           <a:p>
             <a:fld id="{6383FAE1-13DE-4511-8C1B-C8AFB720664C}" type="datetimeFigureOut">
               <a:rPr lang="en-US" smtClean="0"/>
-              <a:t>2/28/2026</a:t>
+              <a:t>4/29/2026</a:t>
             </a:fld>
             <a:endParaRPr lang="en-US"/>
           </a:p>
@@ -11798,8 +11798,8 @@
           <a:chExt cx="0" cy="0"/>
         </a:xfrm>
       </p:grpSpPr>
-      <mc:AlternateContent xmlns:mc="http://schemas.openxmlformats.org/markup-compatibility/2006">
-        <mc:Choice xmlns:a14="http://schemas.microsoft.com/office/drawing/2010/main" Requires="a14">
+      <mc:AlternateContent xmlns:mc="http://schemas.openxmlformats.org/markup-compatibility/2006" xmlns:a14="http://schemas.microsoft.com/office/drawing/2010/main">
+        <mc:Choice Requires="a14">
           <p:sp>
             <p:nvSpPr>
               <p:cNvPr id="7" name="TextBox 6">
@@ -13206,7 +13206,7 @@
             </p:txBody>
           </p:sp>
         </mc:Choice>
-        <mc:Fallback>
+        <mc:Fallback xmlns="">
           <p:sp>
             <p:nvSpPr>
               <p:cNvPr id="7" name="TextBox 6">
@@ -15323,7 +15323,43 @@
                           </a:solidFill>
                           <a:latin typeface="Cambria Math" panose="02040503050406030204" pitchFamily="18" charset="0"/>
                         </a:rPr>
-                        <m:t>=0.5</m:t>
+                        <m:t>=</m:t>
+                      </m:r>
+                      <m:r>
+                        <a:rPr lang="en-US" sz="1400" b="0" i="1" dirty="0" smtClean="0">
+                          <a:solidFill>
+                            <a:schemeClr val="accent6">
+                              <a:lumMod val="60000"/>
+                              <a:lumOff val="40000"/>
+                            </a:schemeClr>
+                          </a:solidFill>
+                          <a:latin typeface="Cambria Math" panose="02040503050406030204" pitchFamily="18" charset="0"/>
+                        </a:rPr>
+                        <m:t>0</m:t>
+                      </m:r>
+                      <m:r>
+                        <a:rPr lang="en-US" sz="1400" b="0" i="1" dirty="0" smtClean="0">
+                          <a:solidFill>
+                            <a:schemeClr val="accent6">
+                              <a:lumMod val="60000"/>
+                              <a:lumOff val="40000"/>
+                            </a:schemeClr>
+                          </a:solidFill>
+                          <a:latin typeface="Cambria Math" panose="02040503050406030204" pitchFamily="18" charset="0"/>
+                        </a:rPr>
+                        <m:t>.</m:t>
+                      </m:r>
+                      <m:r>
+                        <a:rPr lang="en-US" sz="1400" b="0" i="1" dirty="0" smtClean="0">
+                          <a:solidFill>
+                            <a:schemeClr val="accent6">
+                              <a:lumMod val="60000"/>
+                              <a:lumOff val="40000"/>
+                            </a:schemeClr>
+                          </a:solidFill>
+                          <a:latin typeface="Cambria Math" panose="02040503050406030204" pitchFamily="18" charset="0"/>
+                        </a:rPr>
+                        <m:t>5</m:t>
                       </m:r>
                     </m:oMath>
                   </m:oMathPara>
@@ -15856,7 +15892,43 @@
                           </a:solidFill>
                           <a:latin typeface="Cambria Math" panose="02040503050406030204" pitchFamily="18" charset="0"/>
                         </a:rPr>
-                        <m:t>=0.75</m:t>
+                        <m:t>=</m:t>
+                      </m:r>
+                      <m:r>
+                        <a:rPr lang="en-US" sz="1400" b="0" i="1" dirty="0" smtClean="0">
+                          <a:solidFill>
+                            <a:schemeClr val="accent6">
+                              <a:lumMod val="60000"/>
+                              <a:lumOff val="40000"/>
+                            </a:schemeClr>
+                          </a:solidFill>
+                          <a:latin typeface="Cambria Math" panose="02040503050406030204" pitchFamily="18" charset="0"/>
+                        </a:rPr>
+                        <m:t>0</m:t>
+                      </m:r>
+                      <m:r>
+                        <a:rPr lang="en-US" sz="1400" b="0" i="1" dirty="0" smtClean="0">
+                          <a:solidFill>
+                            <a:schemeClr val="accent6">
+                              <a:lumMod val="60000"/>
+                              <a:lumOff val="40000"/>
+                            </a:schemeClr>
+                          </a:solidFill>
+                          <a:latin typeface="Cambria Math" panose="02040503050406030204" pitchFamily="18" charset="0"/>
+                        </a:rPr>
+                        <m:t>.</m:t>
+                      </m:r>
+                      <m:r>
+                        <a:rPr lang="en-US" sz="1400" b="0" i="1" dirty="0" smtClean="0">
+                          <a:solidFill>
+                            <a:schemeClr val="accent6">
+                              <a:lumMod val="60000"/>
+                              <a:lumOff val="40000"/>
+                            </a:schemeClr>
+                          </a:solidFill>
+                          <a:latin typeface="Cambria Math" panose="02040503050406030204" pitchFamily="18" charset="0"/>
+                        </a:rPr>
+                        <m:t>75</m:t>
                       </m:r>
                     </m:oMath>
                   </m:oMathPara>
@@ -16099,7 +16171,31 @@
                               </a:solidFill>
                               <a:latin typeface="Cambria Math" panose="02040503050406030204" pitchFamily="18" charset="0"/>
                             </a:rPr>
-                            <m:t>0.5</m:t>
+                            <m:t>0</m:t>
+                          </m:r>
+                          <m:r>
+                            <a:rPr lang="en-US" sz="1400" b="0" i="0" smtClean="0">
+                              <a:solidFill>
+                                <a:schemeClr val="accent6">
+                                  <a:lumMod val="60000"/>
+                                  <a:lumOff val="40000"/>
+                                </a:schemeClr>
+                              </a:solidFill>
+                              <a:latin typeface="Cambria Math" panose="02040503050406030204" pitchFamily="18" charset="0"/>
+                            </a:rPr>
+                            <m:t>.</m:t>
+                          </m:r>
+                          <m:r>
+                            <a:rPr lang="en-US" sz="1400" b="0" i="0" smtClean="0">
+                              <a:solidFill>
+                                <a:schemeClr val="accent6">
+                                  <a:lumMod val="60000"/>
+                                  <a:lumOff val="40000"/>
+                                </a:schemeClr>
+                              </a:solidFill>
+                              <a:latin typeface="Cambria Math" panose="02040503050406030204" pitchFamily="18" charset="0"/>
+                            </a:rPr>
+                            <m:t>5</m:t>
                           </m:r>
                           <m:r>
                             <a:rPr lang="en-US" sz="1400">
@@ -16123,7 +16219,31 @@
                               </a:solidFill>
                               <a:latin typeface="Cambria Math" panose="02040503050406030204" pitchFamily="18" charset="0"/>
                             </a:rPr>
-                            <m:t>0.75</m:t>
+                            <m:t>0</m:t>
+                          </m:r>
+                          <m:r>
+                            <a:rPr lang="en-US" sz="1400" b="0" i="1" smtClean="0">
+                              <a:solidFill>
+                                <a:schemeClr val="accent6">
+                                  <a:lumMod val="60000"/>
+                                  <a:lumOff val="40000"/>
+                                </a:schemeClr>
+                              </a:solidFill>
+                              <a:latin typeface="Cambria Math" panose="02040503050406030204" pitchFamily="18" charset="0"/>
+                            </a:rPr>
+                            <m:t>.</m:t>
+                          </m:r>
+                          <m:r>
+                            <a:rPr lang="en-US" sz="1400" b="0" i="1" smtClean="0">
+                              <a:solidFill>
+                                <a:schemeClr val="accent6">
+                                  <a:lumMod val="60000"/>
+                                  <a:lumOff val="40000"/>
+                                </a:schemeClr>
+                              </a:solidFill>
+                              <a:latin typeface="Cambria Math" panose="02040503050406030204" pitchFamily="18" charset="0"/>
+                            </a:rPr>
+                            <m:t>75</m:t>
                           </m:r>
                         </m:num>
                         <m:den>
@@ -16137,7 +16257,31 @@
                               </a:solidFill>
                               <a:latin typeface="Cambria Math" panose="02040503050406030204" pitchFamily="18" charset="0"/>
                             </a:rPr>
-                            <m:t>0.5</m:t>
+                            <m:t>0</m:t>
+                          </m:r>
+                          <m:r>
+                            <a:rPr lang="en-US" sz="1400" b="0" i="1" smtClean="0">
+                              <a:solidFill>
+                                <a:schemeClr val="accent6">
+                                  <a:lumMod val="60000"/>
+                                  <a:lumOff val="40000"/>
+                                </a:schemeClr>
+                              </a:solidFill>
+                              <a:latin typeface="Cambria Math" panose="02040503050406030204" pitchFamily="18" charset="0"/>
+                            </a:rPr>
+                            <m:t>.</m:t>
+                          </m:r>
+                          <m:r>
+                            <a:rPr lang="en-US" sz="1400" b="0" i="1" smtClean="0">
+                              <a:solidFill>
+                                <a:schemeClr val="accent6">
+                                  <a:lumMod val="60000"/>
+                                  <a:lumOff val="40000"/>
+                                </a:schemeClr>
+                              </a:solidFill>
+                              <a:latin typeface="Cambria Math" panose="02040503050406030204" pitchFamily="18" charset="0"/>
+                            </a:rPr>
+                            <m:t>5</m:t>
                           </m:r>
                         </m:den>
                       </m:f>
@@ -16151,7 +16295,79 @@
                           </a:solidFill>
                           <a:latin typeface="Cambria Math" panose="02040503050406030204" pitchFamily="18" charset="0"/>
                         </a:rPr>
-                        <m:t>=0.75=75%</m:t>
+                        <m:t>=</m:t>
+                      </m:r>
+                      <m:r>
+                        <a:rPr lang="en-US" sz="1400" b="0" i="1" smtClean="0">
+                          <a:solidFill>
+                            <a:schemeClr val="accent6">
+                              <a:lumMod val="60000"/>
+                              <a:lumOff val="40000"/>
+                            </a:schemeClr>
+                          </a:solidFill>
+                          <a:latin typeface="Cambria Math" panose="02040503050406030204" pitchFamily="18" charset="0"/>
+                        </a:rPr>
+                        <m:t>0</m:t>
+                      </m:r>
+                      <m:r>
+                        <a:rPr lang="en-US" sz="1400" b="0" i="1" smtClean="0">
+                          <a:solidFill>
+                            <a:schemeClr val="accent6">
+                              <a:lumMod val="60000"/>
+                              <a:lumOff val="40000"/>
+                            </a:schemeClr>
+                          </a:solidFill>
+                          <a:latin typeface="Cambria Math" panose="02040503050406030204" pitchFamily="18" charset="0"/>
+                        </a:rPr>
+                        <m:t>.</m:t>
+                      </m:r>
+                      <m:r>
+                        <a:rPr lang="en-US" sz="1400" b="0" i="1" smtClean="0">
+                          <a:solidFill>
+                            <a:schemeClr val="accent6">
+                              <a:lumMod val="60000"/>
+                              <a:lumOff val="40000"/>
+                            </a:schemeClr>
+                          </a:solidFill>
+                          <a:latin typeface="Cambria Math" panose="02040503050406030204" pitchFamily="18" charset="0"/>
+                        </a:rPr>
+                        <m:t>75</m:t>
+                      </m:r>
+                      <m:r>
+                        <a:rPr lang="en-US" sz="1400" b="0" i="1" smtClean="0">
+                          <a:solidFill>
+                            <a:schemeClr val="accent6">
+                              <a:lumMod val="60000"/>
+                              <a:lumOff val="40000"/>
+                            </a:schemeClr>
+                          </a:solidFill>
+                          <a:latin typeface="Cambria Math" panose="02040503050406030204" pitchFamily="18" charset="0"/>
+                        </a:rPr>
+                        <m:t>=</m:t>
+                      </m:r>
+                      <m:r>
+                        <a:rPr lang="en-US" sz="1400" b="0" i="1" smtClean="0">
+                          <a:solidFill>
+                            <a:schemeClr val="accent6">
+                              <a:lumMod val="60000"/>
+                              <a:lumOff val="40000"/>
+                            </a:schemeClr>
+                          </a:solidFill>
+                          <a:latin typeface="Cambria Math" panose="02040503050406030204" pitchFamily="18" charset="0"/>
+                        </a:rPr>
+                        <m:t>75</m:t>
+                      </m:r>
+                      <m:r>
+                        <a:rPr lang="en-US" sz="1400" b="0" i="1" smtClean="0">
+                          <a:solidFill>
+                            <a:schemeClr val="accent6">
+                              <a:lumMod val="60000"/>
+                              <a:lumOff val="40000"/>
+                            </a:schemeClr>
+                          </a:solidFill>
+                          <a:latin typeface="Cambria Math" panose="02040503050406030204" pitchFamily="18" charset="0"/>
+                        </a:rPr>
+                        <m:t>%</m:t>
                       </m:r>
                     </m:oMath>
                   </m:oMathPara>
@@ -16788,8 +17004,8 @@
           <a:chExt cx="0" cy="0"/>
         </a:xfrm>
       </p:grpSpPr>
-      <mc:AlternateContent xmlns:mc="http://schemas.openxmlformats.org/markup-compatibility/2006" xmlns:a14="http://schemas.microsoft.com/office/drawing/2010/main">
-        <mc:Choice Requires="a14">
+      <mc:AlternateContent xmlns:mc="http://schemas.openxmlformats.org/markup-compatibility/2006">
+        <mc:Choice xmlns:a14="http://schemas.microsoft.com/office/drawing/2010/main" Requires="a14">
           <p:sp>
             <p:nvSpPr>
               <p:cNvPr id="7" name="TextBox 6">
@@ -16805,7 +17021,7 @@
             <p:spPr>
               <a:xfrm>
                 <a:off x="243840" y="698066"/>
-                <a:ext cx="10043160" cy="1816716"/>
+                <a:ext cx="11109960" cy="4156202"/>
               </a:xfrm>
               <a:prstGeom prst="rect">
                 <a:avLst/>
@@ -16819,7 +17035,7 @@
               <a:lstStyle/>
               <a:p>
                 <a:r>
-                  <a:rPr lang="en-US" sz="1600" b="1" dirty="0">
+                  <a:rPr lang="en-US" sz="2400" b="1" dirty="0">
                     <a:solidFill>
                       <a:schemeClr val="accent6">
                         <a:lumMod val="60000"/>
@@ -16830,7 +17046,7 @@
                   <a:t>Problem</a:t>
                 </a:r>
                 <a:r>
-                  <a:rPr lang="en-US" sz="1600" dirty="0">
+                  <a:rPr lang="en-US" sz="2400" dirty="0">
                     <a:solidFill>
                       <a:schemeClr val="accent6">
                         <a:lumMod val="60000"/>
@@ -16843,7 +17059,7 @@
               </a:p>
               <a:p>
                 <a:r>
-                  <a:rPr lang="en-US" sz="1600" dirty="0">
+                  <a:rPr lang="en-US" sz="2400" dirty="0">
                     <a:solidFill>
                       <a:schemeClr val="accent6">
                         <a:lumMod val="60000"/>
@@ -16856,7 +17072,7 @@
                 <a14:m>
                   <m:oMath xmlns:m="http://schemas.openxmlformats.org/officeDocument/2006/math">
                     <m:r>
-                      <a:rPr lang="en-US" sz="1600" i="1">
+                      <a:rPr lang="en-US" sz="2400" i="1">
                         <a:solidFill>
                           <a:schemeClr val="accent6">
                             <a:lumMod val="60000"/>
@@ -16870,7 +17086,7 @@
                     <m:d>
                       <m:dPr>
                         <m:ctrlPr>
-                          <a:rPr lang="ar-AE" sz="1600" i="1">
+                          <a:rPr lang="ar-AE" sz="2400" i="1">
                             <a:solidFill>
                               <a:schemeClr val="accent6">
                                 <a:lumMod val="60000"/>
@@ -16883,7 +17099,7 @@
                       </m:dPr>
                       <m:e>
                         <m:r>
-                          <a:rPr lang="ar-AE" sz="1600" i="1">
+                          <a:rPr lang="ar-AE" sz="2400" i="1">
                             <a:solidFill>
                               <a:schemeClr val="accent6">
                                 <a:lumMod val="60000"/>
@@ -16897,7 +17113,7 @@
                       </m:e>
                     </m:d>
                     <m:r>
-                      <a:rPr lang="ar-AE" sz="1600">
+                      <a:rPr lang="ar-AE" sz="2400">
                         <a:solidFill>
                           <a:schemeClr val="accent6">
                             <a:lumMod val="60000"/>
@@ -16909,7 +17125,7 @@
                       <m:t>=</m:t>
                     </m:r>
                     <m:r>
-                      <a:rPr lang="ar-AE" sz="1600">
+                      <a:rPr lang="ar-AE" sz="2400">
                         <a:solidFill>
                           <a:schemeClr val="accent6">
                             <a:lumMod val="60000"/>
@@ -16921,7 +17137,7 @@
                       <m:t>0</m:t>
                     </m:r>
                     <m:r>
-                      <a:rPr lang="ar-AE" sz="1600">
+                      <a:rPr lang="ar-AE" sz="2400">
                         <a:solidFill>
                           <a:schemeClr val="accent6">
                             <a:lumMod val="60000"/>
@@ -16933,7 +17149,7 @@
                       <m:t>.</m:t>
                     </m:r>
                     <m:r>
-                      <a:rPr lang="ar-AE" sz="1600">
+                      <a:rPr lang="ar-AE" sz="2400">
                         <a:solidFill>
                           <a:schemeClr val="accent6">
                             <a:lumMod val="60000"/>
@@ -16946,7 +17162,7 @@
                     </m:r>
                   </m:oMath>
                 </a14:m>
-                <a:endParaRPr lang="ar-AE" sz="1600" dirty="0">
+                <a:endParaRPr lang="ar-AE" sz="2400" dirty="0">
                   <a:solidFill>
                     <a:schemeClr val="accent6">
                       <a:lumMod val="60000"/>
@@ -16957,7 +17173,7 @@
               </a:p>
               <a:p>
                 <a:r>
-                  <a:rPr lang="en-US" sz="1600" dirty="0">
+                  <a:rPr lang="en-US" sz="2400" dirty="0">
                     <a:solidFill>
                       <a:schemeClr val="accent6">
                         <a:lumMod val="60000"/>
@@ -16970,7 +17186,7 @@
                 <a14:m>
                   <m:oMath xmlns:m="http://schemas.openxmlformats.org/officeDocument/2006/math">
                     <m:r>
-                      <a:rPr lang="en-US" sz="1600" i="1">
+                      <a:rPr lang="en-US" sz="2400" i="1">
                         <a:solidFill>
                           <a:schemeClr val="accent6">
                             <a:lumMod val="60000"/>
@@ -16984,7 +17200,7 @@
                     <m:d>
                       <m:dPr>
                         <m:ctrlPr>
-                          <a:rPr lang="ar-AE" sz="1600" i="1">
+                          <a:rPr lang="ar-AE" sz="2400" i="1">
                             <a:solidFill>
                               <a:schemeClr val="accent6">
                                 <a:lumMod val="60000"/>
@@ -17000,7 +17216,7 @@
                           <m:rPr>
                             <m:nor/>
                           </m:rPr>
-                          <a:rPr lang="en-US" sz="1600" i="1">
+                          <a:rPr lang="en-US" sz="2400" i="1">
                             <a:solidFill>
                               <a:schemeClr val="accent6">
                                 <a:lumMod val="60000"/>
@@ -17011,7 +17227,7 @@
                           <m:t>Positive</m:t>
                         </m:r>
                         <m:r>
-                          <a:rPr lang="en-US" sz="1600">
+                          <a:rPr lang="en-US" sz="2400">
                             <a:solidFill>
                               <a:schemeClr val="accent6">
                                 <a:lumMod val="60000"/>
@@ -17023,7 +17239,7 @@
                           <m:t>∣</m:t>
                         </m:r>
                         <m:r>
-                          <a:rPr lang="en-US" sz="1600" b="0" i="1" dirty="0" smtClean="0">
+                          <a:rPr lang="en-US" sz="2400" b="0" i="1" dirty="0" smtClean="0">
                             <a:solidFill>
                               <a:schemeClr val="accent6">
                                 <a:lumMod val="60000"/>
@@ -17037,7 +17253,7 @@
                       </m:e>
                     </m:d>
                     <m:r>
-                      <a:rPr lang="ar-AE" sz="1600">
+                      <a:rPr lang="ar-AE" sz="2400">
                         <a:solidFill>
                           <a:schemeClr val="accent6">
                             <a:lumMod val="60000"/>
@@ -17049,7 +17265,7 @@
                       <m:t>=</m:t>
                     </m:r>
                     <m:r>
-                      <a:rPr lang="ar-AE" sz="1600">
+                      <a:rPr lang="ar-AE" sz="2400">
                         <a:solidFill>
                           <a:schemeClr val="accent6">
                             <a:lumMod val="60000"/>
@@ -17061,7 +17277,7 @@
                       <m:t>0</m:t>
                     </m:r>
                     <m:r>
-                      <a:rPr lang="ar-AE" sz="1600">
+                      <a:rPr lang="ar-AE" sz="2400">
                         <a:solidFill>
                           <a:schemeClr val="accent6">
                             <a:lumMod val="60000"/>
@@ -17073,7 +17289,7 @@
                       <m:t>.</m:t>
                     </m:r>
                     <m:r>
-                      <a:rPr lang="ar-AE" sz="1600">
+                      <a:rPr lang="ar-AE" sz="2400">
                         <a:solidFill>
                           <a:schemeClr val="accent6">
                             <a:lumMod val="60000"/>
@@ -17086,7 +17302,7 @@
                     </m:r>
                   </m:oMath>
                 </a14:m>
-                <a:endParaRPr lang="ar-AE" sz="1600" dirty="0">
+                <a:endParaRPr lang="ar-AE" sz="2400" dirty="0">
                   <a:solidFill>
                     <a:schemeClr val="accent6">
                       <a:lumMod val="60000"/>
@@ -17097,7 +17313,7 @@
               </a:p>
               <a:p>
                 <a:r>
-                  <a:rPr lang="en-US" sz="1600" dirty="0">
+                  <a:rPr lang="en-US" sz="2400" dirty="0">
                     <a:solidFill>
                       <a:schemeClr val="accent6">
                         <a:lumMod val="60000"/>
@@ -17110,7 +17326,7 @@
                 <a14:m>
                   <m:oMath xmlns:m="http://schemas.openxmlformats.org/officeDocument/2006/math">
                     <m:r>
-                      <a:rPr lang="en-US" sz="1600" i="1">
+                      <a:rPr lang="en-US" sz="2400" i="1">
                         <a:solidFill>
                           <a:schemeClr val="accent6">
                             <a:lumMod val="60000"/>
@@ -17124,7 +17340,7 @@
                     <m:d>
                       <m:dPr>
                         <m:ctrlPr>
-                          <a:rPr lang="ar-AE" sz="1600" i="1">
+                          <a:rPr lang="ar-AE" sz="2400" i="1">
                             <a:solidFill>
                               <a:schemeClr val="accent6">
                                 <a:lumMod val="60000"/>
@@ -17140,7 +17356,7 @@
                           <m:rPr>
                             <m:nor/>
                           </m:rPr>
-                          <a:rPr lang="en-US" sz="1600" i="1">
+                          <a:rPr lang="en-US" sz="2400" i="1">
                             <a:solidFill>
                               <a:schemeClr val="accent6">
                                 <a:lumMod val="60000"/>
@@ -17151,7 +17367,7 @@
                           <m:t>Positive</m:t>
                         </m:r>
                         <m:r>
-                          <a:rPr lang="en-US" sz="1600">
+                          <a:rPr lang="en-US" sz="2400">
                             <a:solidFill>
                               <a:schemeClr val="accent6">
                                 <a:lumMod val="60000"/>
@@ -17165,7 +17381,7 @@
                         <m:sSup>
                           <m:sSupPr>
                             <m:ctrlPr>
-                              <a:rPr lang="en-US" sz="1600" i="1" dirty="0">
+                              <a:rPr lang="en-US" sz="2400" i="1" dirty="0">
                                 <a:solidFill>
                                   <a:schemeClr val="accent6">
                                     <a:lumMod val="60000"/>
@@ -17178,7 +17394,7 @@
                           </m:sSupPr>
                           <m:e>
                             <m:r>
-                              <a:rPr lang="en-US" sz="1600" i="1" dirty="0">
+                              <a:rPr lang="en-US" sz="2400" i="1" dirty="0">
                                 <a:solidFill>
                                   <a:schemeClr val="accent6">
                                     <a:lumMod val="60000"/>
@@ -17192,7 +17408,7 @@
                           </m:e>
                           <m:sup>
                             <m:r>
-                              <a:rPr lang="en-US" sz="1600" i="1" dirty="0">
+                              <a:rPr lang="en-US" sz="2400" i="1" dirty="0">
                                 <a:solidFill>
                                   <a:schemeClr val="accent6">
                                     <a:lumMod val="60000"/>
@@ -17208,7 +17424,7 @@
                       </m:e>
                     </m:d>
                     <m:r>
-                      <a:rPr lang="ar-AE" sz="1600">
+                      <a:rPr lang="ar-AE" sz="2400">
                         <a:solidFill>
                           <a:schemeClr val="accent6">
                             <a:lumMod val="60000"/>
@@ -17220,7 +17436,7 @@
                       <m:t>=</m:t>
                     </m:r>
                     <m:r>
-                      <a:rPr lang="ar-AE" sz="1600">
+                      <a:rPr lang="ar-AE" sz="2400">
                         <a:solidFill>
                           <a:schemeClr val="accent6">
                             <a:lumMod val="60000"/>
@@ -17232,7 +17448,7 @@
                       <m:t>0</m:t>
                     </m:r>
                     <m:r>
-                      <a:rPr lang="ar-AE" sz="1600">
+                      <a:rPr lang="ar-AE" sz="2400">
                         <a:solidFill>
                           <a:schemeClr val="accent6">
                             <a:lumMod val="60000"/>
@@ -17244,7 +17460,7 @@
                       <m:t>.</m:t>
                     </m:r>
                     <m:r>
-                      <a:rPr lang="ar-AE" sz="1600">
+                      <a:rPr lang="ar-AE" sz="2400">
                         <a:solidFill>
                           <a:schemeClr val="accent6">
                             <a:lumMod val="60000"/>
@@ -17257,7 +17473,17 @@
                     </m:r>
                   </m:oMath>
                 </a14:m>
-                <a:endParaRPr lang="ar-AE" sz="1600" dirty="0">
+                <a:endParaRPr lang="en-US" sz="2400" dirty="0">
+                  <a:solidFill>
+                    <a:schemeClr val="accent6">
+                      <a:lumMod val="60000"/>
+                      <a:lumOff val="40000"/>
+                    </a:schemeClr>
+                  </a:solidFill>
+                </a:endParaRPr>
+              </a:p>
+              <a:p>
+                <a:endParaRPr lang="ar-AE" sz="2400" dirty="0">
                   <a:solidFill>
                     <a:schemeClr val="accent6">
                       <a:lumMod val="60000"/>
@@ -17268,7 +17494,7 @@
               </a:p>
               <a:p>
                 <a:r>
-                  <a:rPr lang="en-US" sz="1600" dirty="0">
+                  <a:rPr lang="en-US" sz="2400" dirty="0">
                     <a:solidFill>
                       <a:schemeClr val="accent6">
                         <a:lumMod val="60000"/>
@@ -17279,7 +17505,7 @@
                   <a:t>1) What is the probability that a person has the disease, </a:t>
                 </a:r>
                 <a:r>
-                  <a:rPr lang="en-US" sz="1600" b="1" dirty="0">
+                  <a:rPr lang="en-US" sz="2400" b="1" dirty="0">
                     <a:solidFill>
                       <a:schemeClr val="accent6">
                         <a:lumMod val="60000"/>
@@ -17290,7 +17516,7 @@
                   <a:t>before any testing</a:t>
                 </a:r>
                 <a:r>
-                  <a:rPr lang="en-US" sz="1600" dirty="0">
+                  <a:rPr lang="en-US" sz="2400" dirty="0">
                     <a:solidFill>
                       <a:schemeClr val="accent6">
                         <a:lumMod val="60000"/>
@@ -17303,7 +17529,7 @@
               </a:p>
               <a:p>
                 <a:r>
-                  <a:rPr lang="en-US" sz="1600" dirty="0">
+                  <a:rPr lang="en-US" sz="2400" dirty="0">
                     <a:solidFill>
                       <a:schemeClr val="accent6">
                         <a:lumMod val="60000"/>
@@ -17314,7 +17540,7 @@
                   <a:t>2) What is the probability that a person actually has the disease, given the evidence that </a:t>
                 </a:r>
                 <a:r>
-                  <a:rPr lang="en-US" sz="1600" b="1" dirty="0">
+                  <a:rPr lang="en-US" sz="2400" b="1" dirty="0">
                     <a:solidFill>
                       <a:schemeClr val="accent6">
                         <a:lumMod val="60000"/>
@@ -17326,8 +17552,18 @@
                 </a:r>
               </a:p>
               <a:p>
+                <a:endParaRPr lang="en-US" sz="2400" b="1" dirty="0">
+                  <a:solidFill>
+                    <a:schemeClr val="accent6">
+                      <a:lumMod val="60000"/>
+                      <a:lumOff val="40000"/>
+                    </a:schemeClr>
+                  </a:solidFill>
+                </a:endParaRPr>
+              </a:p>
+              <a:p>
                 <a:r>
-                  <a:rPr lang="en-US" sz="1600" dirty="0">
+                  <a:rPr lang="en-US" sz="2400" dirty="0">
                     <a:solidFill>
                       <a:schemeClr val="accent6">
                         <a:lumMod val="60000"/>
@@ -17338,7 +17574,7 @@
                   <a:t>Above, D is the event that person has disease and </a:t>
                 </a:r>
                 <a:r>
-                  <a:rPr lang="en-US" sz="1600" i="1" dirty="0">
+                  <a:rPr lang="en-US" sz="2400" i="1" dirty="0">
                     <a:solidFill>
                       <a:schemeClr val="accent6">
                         <a:lumMod val="60000"/>
@@ -17349,7 +17585,7 @@
                   <a:t>Positive </a:t>
                 </a:r>
                 <a:r>
-                  <a:rPr lang="en-US" sz="1600" dirty="0">
+                  <a:rPr lang="en-US" sz="2400" dirty="0">
                     <a:solidFill>
                       <a:schemeClr val="accent6">
                         <a:lumMod val="60000"/>
@@ -17359,7 +17595,7 @@
                   </a:rPr>
                   <a:t> is the event that the test result is positive,</a:t>
                 </a:r>
-                <a:endParaRPr lang="en-US" sz="1600" i="1" dirty="0">
+                <a:endParaRPr lang="en-US" sz="2400" i="1" dirty="0">
                   <a:solidFill>
                     <a:schemeClr val="accent6">
                       <a:lumMod val="60000"/>
@@ -17371,7 +17607,7 @@
             </p:txBody>
           </p:sp>
         </mc:Choice>
-        <mc:Fallback xmlns="">
+        <mc:Fallback>
           <p:sp>
             <p:nvSpPr>
               <p:cNvPr id="7" name="TextBox 6">
@@ -17389,7 +17625,7 @@
             <p:spPr>
               <a:xfrm>
                 <a:off x="243840" y="698066"/>
-                <a:ext cx="10043160" cy="1816716"/>
+                <a:ext cx="11109960" cy="4156202"/>
               </a:xfrm>
               <a:prstGeom prst="rect">
                 <a:avLst/>
@@ -17397,7 +17633,7 @@
               <a:blipFill>
                 <a:blip r:embed="rId2"/>
                 <a:stretch>
-                  <a:fillRect l="-303" t="-1007" b="-3356"/>
+                  <a:fillRect l="-823" t="-1175" r="-1042" b="-2496"/>
                 </a:stretch>
               </a:blipFill>
             </p:spPr>
@@ -17841,7 +18077,7 @@
         </p:blipFill>
         <p:spPr>
           <a:xfrm>
-            <a:off x="9479280" y="2250011"/>
+            <a:off x="8751613" y="4673171"/>
             <a:ext cx="2602187" cy="1398190"/>
           </a:xfrm>
           <a:prstGeom prst="rect">
@@ -17885,8 +18121,8 @@
           <a:chExt cx="0" cy="0"/>
         </a:xfrm>
       </p:grpSpPr>
-      <mc:AlternateContent xmlns:mc="http://schemas.openxmlformats.org/markup-compatibility/2006" xmlns:a14="http://schemas.microsoft.com/office/drawing/2010/main">
-        <mc:Choice Requires="a14">
+      <mc:AlternateContent xmlns:mc="http://schemas.openxmlformats.org/markup-compatibility/2006">
+        <mc:Choice xmlns:a14="http://schemas.microsoft.com/office/drawing/2010/main" Requires="a14">
           <p:sp>
             <p:nvSpPr>
               <p:cNvPr id="7" name="TextBox 6">
@@ -17901,8 +18137,8 @@
             </p:nvSpPr>
             <p:spPr>
               <a:xfrm>
-                <a:off x="243840" y="698066"/>
-                <a:ext cx="10043160" cy="6239978"/>
+                <a:off x="110533" y="284684"/>
+                <a:ext cx="11378184" cy="6727034"/>
               </a:xfrm>
               <a:prstGeom prst="rect">
                 <a:avLst/>
@@ -17916,7 +18152,7 @@
               <a:lstStyle/>
               <a:p>
                 <a:r>
-                  <a:rPr lang="en-US" sz="1600" b="1" dirty="0">
+                  <a:rPr lang="en-US" sz="2400" dirty="0">
                     <a:solidFill>
                       <a:schemeClr val="accent6">
                         <a:lumMod val="60000"/>
@@ -17924,10 +18160,10 @@
                       </a:schemeClr>
                     </a:solidFill>
                   </a:rPr>
-                  <a:t>Problem</a:t>
+                  <a:t>Ans 1) The probability that a person has the disease, </a:t>
                 </a:r>
                 <a:r>
-                  <a:rPr lang="en-US" sz="1600" dirty="0">
+                  <a:rPr lang="en-US" sz="2400" b="1" dirty="0">
                     <a:solidFill>
                       <a:schemeClr val="accent6">
                         <a:lumMod val="60000"/>
@@ -17935,12 +18171,10 @@
                       </a:schemeClr>
                     </a:solidFill>
                   </a:rPr>
-                  <a:t>: Suppose</a:t>
+                  <a:t>before any testing</a:t>
                 </a:r>
-              </a:p>
-              <a:p>
                 <a:r>
-                  <a:rPr lang="en-US" sz="1600" dirty="0">
+                  <a:rPr lang="en-US" sz="2400" dirty="0">
                     <a:solidFill>
                       <a:schemeClr val="accent6">
                         <a:lumMod val="60000"/>
@@ -17948,12 +18182,12 @@
                       </a:schemeClr>
                     </a:solidFill>
                   </a:rPr>
-                  <a:t>1% of people have a certain disease → </a:t>
+                  <a:t> is given to us: </a:t>
                 </a:r>
                 <a14:m>
                   <m:oMath xmlns:m="http://schemas.openxmlformats.org/officeDocument/2006/math">
                     <m:r>
-                      <a:rPr lang="en-US" sz="1600" i="1">
+                      <a:rPr lang="en-US" sz="2400" i="1">
                         <a:solidFill>
                           <a:schemeClr val="accent6">
                             <a:lumMod val="60000"/>
@@ -17967,7 +18201,7 @@
                     <m:d>
                       <m:dPr>
                         <m:ctrlPr>
-                          <a:rPr lang="ar-AE" sz="1600" i="1">
+                          <a:rPr lang="ar-AE" sz="2400" i="1">
                             <a:solidFill>
                               <a:schemeClr val="accent6">
                                 <a:lumMod val="60000"/>
@@ -17980,7 +18214,7 @@
                       </m:dPr>
                       <m:e>
                         <m:r>
-                          <a:rPr lang="ar-AE" sz="1600" i="1">
+                          <a:rPr lang="ar-AE" sz="2400" i="1">
                             <a:solidFill>
                               <a:schemeClr val="accent6">
                                 <a:lumMod val="60000"/>
@@ -17994,7 +18228,7 @@
                       </m:e>
                     </m:d>
                     <m:r>
-                      <a:rPr lang="ar-AE" sz="1600">
+                      <a:rPr lang="ar-AE" sz="2400">
                         <a:solidFill>
                           <a:schemeClr val="accent6">
                             <a:lumMod val="60000"/>
@@ -18006,7 +18240,7 @@
                       <m:t>=</m:t>
                     </m:r>
                     <m:r>
-                      <a:rPr lang="ar-AE" sz="1600">
+                      <a:rPr lang="ar-AE" sz="2400">
                         <a:solidFill>
                           <a:schemeClr val="accent6">
                             <a:lumMod val="60000"/>
@@ -18018,7 +18252,7 @@
                       <m:t>0</m:t>
                     </m:r>
                     <m:r>
-                      <a:rPr lang="ar-AE" sz="1600">
+                      <a:rPr lang="ar-AE" sz="2400">
                         <a:solidFill>
                           <a:schemeClr val="accent6">
                             <a:lumMod val="60000"/>
@@ -18030,7 +18264,7 @@
                       <m:t>.</m:t>
                     </m:r>
                     <m:r>
-                      <a:rPr lang="ar-AE" sz="1600">
+                      <a:rPr lang="ar-AE" sz="2400">
                         <a:solidFill>
                           <a:schemeClr val="accent6">
                             <a:lumMod val="60000"/>
@@ -18043,7 +18277,17 @@
                     </m:r>
                   </m:oMath>
                 </a14:m>
-                <a:endParaRPr lang="ar-AE" sz="1600" dirty="0">
+                <a:endParaRPr lang="en-US" sz="2400" dirty="0">
+                  <a:solidFill>
+                    <a:schemeClr val="accent6">
+                      <a:lumMod val="60000"/>
+                      <a:lumOff val="40000"/>
+                    </a:schemeClr>
+                  </a:solidFill>
+                </a:endParaRPr>
+              </a:p>
+              <a:p>
+                <a:endParaRPr lang="en-US" sz="2400" dirty="0">
                   <a:solidFill>
                     <a:schemeClr val="accent6">
                       <a:lumMod val="60000"/>
@@ -18054,587 +18298,7 @@
               </a:p>
               <a:p>
                 <a:r>
-                  <a:rPr lang="en-US" sz="1600" dirty="0">
-                    <a:solidFill>
-                      <a:schemeClr val="accent6">
-                        <a:lumMod val="60000"/>
-                        <a:lumOff val="40000"/>
-                      </a:schemeClr>
-                    </a:solidFill>
-                  </a:rPr>
-                  <a:t>A test detects the disease correctly 99% of the time → </a:t>
-                </a:r>
-                <a14:m>
-                  <m:oMath xmlns:m="http://schemas.openxmlformats.org/officeDocument/2006/math">
-                    <m:r>
-                      <a:rPr lang="en-US" sz="1600" i="1">
-                        <a:solidFill>
-                          <a:schemeClr val="accent6">
-                            <a:lumMod val="60000"/>
-                            <a:lumOff val="40000"/>
-                          </a:schemeClr>
-                        </a:solidFill>
-                        <a:latin typeface="Cambria Math" panose="02040503050406030204" pitchFamily="18" charset="0"/>
-                      </a:rPr>
-                      <m:t>𝑃</m:t>
-                    </m:r>
-                    <m:d>
-                      <m:dPr>
-                        <m:ctrlPr>
-                          <a:rPr lang="ar-AE" sz="1600" i="1">
-                            <a:solidFill>
-                              <a:schemeClr val="accent6">
-                                <a:lumMod val="60000"/>
-                                <a:lumOff val="40000"/>
-                              </a:schemeClr>
-                            </a:solidFill>
-                            <a:latin typeface="Cambria Math" panose="02040503050406030204" pitchFamily="18" charset="0"/>
-                          </a:rPr>
-                        </m:ctrlPr>
-                      </m:dPr>
-                      <m:e>
-                        <m:r>
-                          <m:rPr>
-                            <m:nor/>
-                          </m:rPr>
-                          <a:rPr lang="en-US" sz="1600" i="1">
-                            <a:solidFill>
-                              <a:schemeClr val="accent6">
-                                <a:lumMod val="60000"/>
-                                <a:lumOff val="40000"/>
-                              </a:schemeClr>
-                            </a:solidFill>
-                          </a:rPr>
-                          <m:t>Positive</m:t>
-                        </m:r>
-                        <m:r>
-                          <a:rPr lang="en-US" sz="1600">
-                            <a:solidFill>
-                              <a:schemeClr val="accent6">
-                                <a:lumMod val="60000"/>
-                                <a:lumOff val="40000"/>
-                              </a:schemeClr>
-                            </a:solidFill>
-                            <a:latin typeface="Cambria Math" panose="02040503050406030204" pitchFamily="18" charset="0"/>
-                          </a:rPr>
-                          <m:t>∣</m:t>
-                        </m:r>
-                        <m:r>
-                          <a:rPr lang="en-US" sz="1600" i="1" dirty="0">
-                            <a:solidFill>
-                              <a:schemeClr val="accent6">
-                                <a:lumMod val="60000"/>
-                                <a:lumOff val="40000"/>
-                              </a:schemeClr>
-                            </a:solidFill>
-                            <a:latin typeface="Cambria Math" panose="02040503050406030204" pitchFamily="18" charset="0"/>
-                          </a:rPr>
-                          <m:t>𝐷</m:t>
-                        </m:r>
-                      </m:e>
-                    </m:d>
-                    <m:r>
-                      <a:rPr lang="ar-AE" sz="1600">
-                        <a:solidFill>
-                          <a:schemeClr val="accent6">
-                            <a:lumMod val="60000"/>
-                            <a:lumOff val="40000"/>
-                          </a:schemeClr>
-                        </a:solidFill>
-                        <a:latin typeface="Cambria Math" panose="02040503050406030204" pitchFamily="18" charset="0"/>
-                      </a:rPr>
-                      <m:t>=</m:t>
-                    </m:r>
-                    <m:r>
-                      <a:rPr lang="ar-AE" sz="1600">
-                        <a:solidFill>
-                          <a:schemeClr val="accent6">
-                            <a:lumMod val="60000"/>
-                            <a:lumOff val="40000"/>
-                          </a:schemeClr>
-                        </a:solidFill>
-                        <a:latin typeface="Cambria Math" panose="02040503050406030204" pitchFamily="18" charset="0"/>
-                      </a:rPr>
-                      <m:t>0</m:t>
-                    </m:r>
-                    <m:r>
-                      <a:rPr lang="ar-AE" sz="1600">
-                        <a:solidFill>
-                          <a:schemeClr val="accent6">
-                            <a:lumMod val="60000"/>
-                            <a:lumOff val="40000"/>
-                          </a:schemeClr>
-                        </a:solidFill>
-                        <a:latin typeface="Cambria Math" panose="02040503050406030204" pitchFamily="18" charset="0"/>
-                      </a:rPr>
-                      <m:t>.</m:t>
-                    </m:r>
-                    <m:r>
-                      <a:rPr lang="ar-AE" sz="1600">
-                        <a:solidFill>
-                          <a:schemeClr val="accent6">
-                            <a:lumMod val="60000"/>
-                            <a:lumOff val="40000"/>
-                          </a:schemeClr>
-                        </a:solidFill>
-                        <a:latin typeface="Cambria Math" panose="02040503050406030204" pitchFamily="18" charset="0"/>
-                      </a:rPr>
-                      <m:t>99</m:t>
-                    </m:r>
-                  </m:oMath>
-                </a14:m>
-                <a:endParaRPr lang="ar-AE" sz="1600" dirty="0">
-                  <a:solidFill>
-                    <a:schemeClr val="accent6">
-                      <a:lumMod val="60000"/>
-                      <a:lumOff val="40000"/>
-                    </a:schemeClr>
-                  </a:solidFill>
-                </a:endParaRPr>
-              </a:p>
-              <a:p>
-                <a:r>
-                  <a:rPr lang="en-US" sz="1600" dirty="0">
-                    <a:solidFill>
-                      <a:schemeClr val="accent6">
-                        <a:lumMod val="60000"/>
-                        <a:lumOff val="40000"/>
-                      </a:schemeClr>
-                    </a:solidFill>
-                  </a:rPr>
-                  <a:t>The test gives a false positive 2% of the time → </a:t>
-                </a:r>
-                <a14:m>
-                  <m:oMath xmlns:m="http://schemas.openxmlformats.org/officeDocument/2006/math">
-                    <m:r>
-                      <a:rPr lang="en-US" sz="1600" i="1">
-                        <a:solidFill>
-                          <a:schemeClr val="accent6">
-                            <a:lumMod val="60000"/>
-                            <a:lumOff val="40000"/>
-                          </a:schemeClr>
-                        </a:solidFill>
-                        <a:latin typeface="Cambria Math" panose="02040503050406030204" pitchFamily="18" charset="0"/>
-                      </a:rPr>
-                      <m:t>𝑃</m:t>
-                    </m:r>
-                    <m:d>
-                      <m:dPr>
-                        <m:ctrlPr>
-                          <a:rPr lang="ar-AE" sz="1600" i="1">
-                            <a:solidFill>
-                              <a:schemeClr val="accent6">
-                                <a:lumMod val="60000"/>
-                                <a:lumOff val="40000"/>
-                              </a:schemeClr>
-                            </a:solidFill>
-                            <a:latin typeface="Cambria Math" panose="02040503050406030204" pitchFamily="18" charset="0"/>
-                          </a:rPr>
-                        </m:ctrlPr>
-                      </m:dPr>
-                      <m:e>
-                        <m:r>
-                          <m:rPr>
-                            <m:nor/>
-                          </m:rPr>
-                          <a:rPr lang="en-US" sz="1600" i="1">
-                            <a:solidFill>
-                              <a:schemeClr val="accent6">
-                                <a:lumMod val="60000"/>
-                                <a:lumOff val="40000"/>
-                              </a:schemeClr>
-                            </a:solidFill>
-                          </a:rPr>
-                          <m:t>Positive</m:t>
-                        </m:r>
-                        <m:r>
-                          <a:rPr lang="en-US" sz="1600">
-                            <a:solidFill>
-                              <a:schemeClr val="accent6">
-                                <a:lumMod val="60000"/>
-                                <a:lumOff val="40000"/>
-                              </a:schemeClr>
-                            </a:solidFill>
-                            <a:latin typeface="Cambria Math" panose="02040503050406030204" pitchFamily="18" charset="0"/>
-                          </a:rPr>
-                          <m:t>∣</m:t>
-                        </m:r>
-                        <m:sSup>
-                          <m:sSupPr>
-                            <m:ctrlPr>
-                              <a:rPr lang="en-US" sz="1600" i="1" dirty="0">
-                                <a:solidFill>
-                                  <a:schemeClr val="accent6">
-                                    <a:lumMod val="60000"/>
-                                    <a:lumOff val="40000"/>
-                                  </a:schemeClr>
-                                </a:solidFill>
-                                <a:latin typeface="Cambria Math" panose="02040503050406030204" pitchFamily="18" charset="0"/>
-                              </a:rPr>
-                            </m:ctrlPr>
-                          </m:sSupPr>
-                          <m:e>
-                            <m:r>
-                              <a:rPr lang="en-US" sz="1600" i="1" dirty="0">
-                                <a:solidFill>
-                                  <a:schemeClr val="accent6">
-                                    <a:lumMod val="60000"/>
-                                    <a:lumOff val="40000"/>
-                                  </a:schemeClr>
-                                </a:solidFill>
-                                <a:latin typeface="Cambria Math" panose="02040503050406030204" pitchFamily="18" charset="0"/>
-                              </a:rPr>
-                              <m:t>𝐷</m:t>
-                            </m:r>
-                          </m:e>
-                          <m:sup>
-                            <m:r>
-                              <a:rPr lang="en-US" sz="1600" i="1" dirty="0">
-                                <a:solidFill>
-                                  <a:schemeClr val="accent6">
-                                    <a:lumMod val="60000"/>
-                                    <a:lumOff val="40000"/>
-                                  </a:schemeClr>
-                                </a:solidFill>
-                                <a:latin typeface="Cambria Math" panose="02040503050406030204" pitchFamily="18" charset="0"/>
-                              </a:rPr>
-                              <m:t>𝐶</m:t>
-                            </m:r>
-                          </m:sup>
-                        </m:sSup>
-                      </m:e>
-                    </m:d>
-                    <m:r>
-                      <a:rPr lang="ar-AE" sz="1600">
-                        <a:solidFill>
-                          <a:schemeClr val="accent6">
-                            <a:lumMod val="60000"/>
-                            <a:lumOff val="40000"/>
-                          </a:schemeClr>
-                        </a:solidFill>
-                        <a:latin typeface="Cambria Math" panose="02040503050406030204" pitchFamily="18" charset="0"/>
-                      </a:rPr>
-                      <m:t>=</m:t>
-                    </m:r>
-                    <m:r>
-                      <a:rPr lang="ar-AE" sz="1600">
-                        <a:solidFill>
-                          <a:schemeClr val="accent6">
-                            <a:lumMod val="60000"/>
-                            <a:lumOff val="40000"/>
-                          </a:schemeClr>
-                        </a:solidFill>
-                        <a:latin typeface="Cambria Math" panose="02040503050406030204" pitchFamily="18" charset="0"/>
-                      </a:rPr>
-                      <m:t>0</m:t>
-                    </m:r>
-                    <m:r>
-                      <a:rPr lang="ar-AE" sz="1600">
-                        <a:solidFill>
-                          <a:schemeClr val="accent6">
-                            <a:lumMod val="60000"/>
-                            <a:lumOff val="40000"/>
-                          </a:schemeClr>
-                        </a:solidFill>
-                        <a:latin typeface="Cambria Math" panose="02040503050406030204" pitchFamily="18" charset="0"/>
-                      </a:rPr>
-                      <m:t>.</m:t>
-                    </m:r>
-                    <m:r>
-                      <a:rPr lang="ar-AE" sz="1600">
-                        <a:solidFill>
-                          <a:schemeClr val="accent6">
-                            <a:lumMod val="60000"/>
-                            <a:lumOff val="40000"/>
-                          </a:schemeClr>
-                        </a:solidFill>
-                        <a:latin typeface="Cambria Math" panose="02040503050406030204" pitchFamily="18" charset="0"/>
-                      </a:rPr>
-                      <m:t>02</m:t>
-                    </m:r>
-                  </m:oMath>
-                </a14:m>
-                <a:endParaRPr lang="ar-AE" sz="1600" dirty="0">
-                  <a:solidFill>
-                    <a:schemeClr val="accent6">
-                      <a:lumMod val="60000"/>
-                      <a:lumOff val="40000"/>
-                    </a:schemeClr>
-                  </a:solidFill>
-                </a:endParaRPr>
-              </a:p>
-              <a:p>
-                <a:r>
-                  <a:rPr lang="en-US" sz="1600" dirty="0">
-                    <a:solidFill>
-                      <a:schemeClr val="accent6">
-                        <a:lumMod val="60000"/>
-                        <a:lumOff val="40000"/>
-                      </a:schemeClr>
-                    </a:solidFill>
-                  </a:rPr>
-                  <a:t>1) What is the probability that a person has the disease, </a:t>
-                </a:r>
-                <a:r>
-                  <a:rPr lang="en-US" sz="1600" b="1" dirty="0">
-                    <a:solidFill>
-                      <a:schemeClr val="accent6">
-                        <a:lumMod val="60000"/>
-                        <a:lumOff val="40000"/>
-                      </a:schemeClr>
-                    </a:solidFill>
-                  </a:rPr>
-                  <a:t>before any testing</a:t>
-                </a:r>
-                <a:r>
-                  <a:rPr lang="en-US" sz="1600" dirty="0">
-                    <a:solidFill>
-                      <a:schemeClr val="accent6">
-                        <a:lumMod val="60000"/>
-                        <a:lumOff val="40000"/>
-                      </a:schemeClr>
-                    </a:solidFill>
-                  </a:rPr>
-                  <a:t> ?</a:t>
-                </a:r>
-              </a:p>
-              <a:p>
-                <a:r>
-                  <a:rPr lang="en-US" sz="1600" dirty="0">
-                    <a:solidFill>
-                      <a:schemeClr val="accent6">
-                        <a:lumMod val="60000"/>
-                        <a:lumOff val="40000"/>
-                      </a:schemeClr>
-                    </a:solidFill>
-                  </a:rPr>
-                  <a:t>2) What is the probability that a person actually has the disease, given the evidence that </a:t>
-                </a:r>
-                <a:r>
-                  <a:rPr lang="en-US" sz="1600" b="1" dirty="0">
-                    <a:solidFill>
-                      <a:schemeClr val="accent6">
-                        <a:lumMod val="60000"/>
-                        <a:lumOff val="40000"/>
-                      </a:schemeClr>
-                    </a:solidFill>
-                  </a:rPr>
-                  <a:t>the test result is positive ?</a:t>
-                </a:r>
-              </a:p>
-              <a:p>
-                <a:r>
-                  <a:rPr lang="en-US" sz="1600">
-                    <a:solidFill>
-                      <a:schemeClr val="accent6">
-                        <a:lumMod val="60000"/>
-                        <a:lumOff val="40000"/>
-                      </a:schemeClr>
-                    </a:solidFill>
-                  </a:rPr>
-                  <a:t>Above </a:t>
-                </a:r>
-                <a:r>
-                  <a:rPr lang="en-US" sz="1600" dirty="0">
-                    <a:solidFill>
-                      <a:schemeClr val="accent6">
-                        <a:lumMod val="60000"/>
-                        <a:lumOff val="40000"/>
-                      </a:schemeClr>
-                    </a:solidFill>
-                  </a:rPr>
-                  <a:t>D is the event that person has disease and </a:t>
-                </a:r>
-                <a:r>
-                  <a:rPr lang="en-US" sz="1600" i="1" dirty="0">
-                    <a:solidFill>
-                      <a:schemeClr val="accent6">
-                        <a:lumMod val="60000"/>
-                        <a:lumOff val="40000"/>
-                      </a:schemeClr>
-                    </a:solidFill>
-                  </a:rPr>
-                  <a:t>Positive </a:t>
-                </a:r>
-                <a:r>
-                  <a:rPr lang="en-US" sz="1600" dirty="0">
-                    <a:solidFill>
-                      <a:schemeClr val="accent6">
-                        <a:lumMod val="60000"/>
-                        <a:lumOff val="40000"/>
-                      </a:schemeClr>
-                    </a:solidFill>
-                  </a:rPr>
-                  <a:t> is the event that the test result is positive,</a:t>
-                </a:r>
-                <a:endParaRPr lang="en-US" sz="1600" b="1" dirty="0">
-                  <a:solidFill>
-                    <a:schemeClr val="accent6">
-                      <a:lumMod val="60000"/>
-                      <a:lumOff val="40000"/>
-                    </a:schemeClr>
-                  </a:solidFill>
-                </a:endParaRPr>
-              </a:p>
-              <a:p>
-                <a:endParaRPr lang="en-US" sz="1600" dirty="0">
-                  <a:solidFill>
-                    <a:schemeClr val="accent6">
-                      <a:lumMod val="60000"/>
-                      <a:lumOff val="40000"/>
-                    </a:schemeClr>
-                  </a:solidFill>
-                </a:endParaRPr>
-              </a:p>
-              <a:p>
-                <a:r>
-                  <a:rPr lang="en-US" sz="1600" dirty="0">
-                    <a:solidFill>
-                      <a:schemeClr val="accent6">
-                        <a:lumMod val="60000"/>
-                        <a:lumOff val="40000"/>
-                      </a:schemeClr>
-                    </a:solidFill>
-                  </a:rPr>
-                  <a:t>Ans 1) The probability that a person has the disease, </a:t>
-                </a:r>
-                <a:r>
-                  <a:rPr lang="en-US" sz="1600" b="1" dirty="0">
-                    <a:solidFill>
-                      <a:schemeClr val="accent6">
-                        <a:lumMod val="60000"/>
-                        <a:lumOff val="40000"/>
-                      </a:schemeClr>
-                    </a:solidFill>
-                  </a:rPr>
-                  <a:t>before any testing</a:t>
-                </a:r>
-                <a:r>
-                  <a:rPr lang="en-US" sz="1600" dirty="0">
-                    <a:solidFill>
-                      <a:schemeClr val="accent6">
-                        <a:lumMod val="60000"/>
-                        <a:lumOff val="40000"/>
-                      </a:schemeClr>
-                    </a:solidFill>
-                  </a:rPr>
-                  <a:t> is given to us: </a:t>
-                </a:r>
-                <a14:m>
-                  <m:oMath xmlns:m="http://schemas.openxmlformats.org/officeDocument/2006/math">
-                    <m:r>
-                      <a:rPr lang="en-US" sz="1600" i="1">
-                        <a:solidFill>
-                          <a:schemeClr val="accent6">
-                            <a:lumMod val="60000"/>
-                            <a:lumOff val="40000"/>
-                          </a:schemeClr>
-                        </a:solidFill>
-                        <a:latin typeface="Cambria Math" panose="02040503050406030204" pitchFamily="18" charset="0"/>
-                      </a:rPr>
-                      <m:t>𝑃</m:t>
-                    </m:r>
-                    <m:d>
-                      <m:dPr>
-                        <m:ctrlPr>
-                          <a:rPr lang="ar-AE" sz="1600" i="1">
-                            <a:solidFill>
-                              <a:schemeClr val="accent6">
-                                <a:lumMod val="60000"/>
-                                <a:lumOff val="40000"/>
-                              </a:schemeClr>
-                            </a:solidFill>
-                            <a:latin typeface="Cambria Math" panose="02040503050406030204" pitchFamily="18" charset="0"/>
-                          </a:rPr>
-                        </m:ctrlPr>
-                      </m:dPr>
-                      <m:e>
-                        <m:r>
-                          <a:rPr lang="ar-AE" sz="1600" i="1">
-                            <a:solidFill>
-                              <a:schemeClr val="accent6">
-                                <a:lumMod val="60000"/>
-                                <a:lumOff val="40000"/>
-                              </a:schemeClr>
-                            </a:solidFill>
-                            <a:latin typeface="Cambria Math" panose="02040503050406030204" pitchFamily="18" charset="0"/>
-                          </a:rPr>
-                          <m:t>𝐷</m:t>
-                        </m:r>
-                      </m:e>
-                    </m:d>
-                    <m:r>
-                      <a:rPr lang="ar-AE" sz="1600">
-                        <a:solidFill>
-                          <a:schemeClr val="accent6">
-                            <a:lumMod val="60000"/>
-                            <a:lumOff val="40000"/>
-                          </a:schemeClr>
-                        </a:solidFill>
-                        <a:latin typeface="Cambria Math" panose="02040503050406030204" pitchFamily="18" charset="0"/>
-                      </a:rPr>
-                      <m:t>=</m:t>
-                    </m:r>
-                    <m:r>
-                      <a:rPr lang="ar-AE" sz="1600">
-                        <a:solidFill>
-                          <a:schemeClr val="accent6">
-                            <a:lumMod val="60000"/>
-                            <a:lumOff val="40000"/>
-                          </a:schemeClr>
-                        </a:solidFill>
-                        <a:latin typeface="Cambria Math" panose="02040503050406030204" pitchFamily="18" charset="0"/>
-                      </a:rPr>
-                      <m:t>0</m:t>
-                    </m:r>
-                    <m:r>
-                      <a:rPr lang="ar-AE" sz="1600">
-                        <a:solidFill>
-                          <a:schemeClr val="accent6">
-                            <a:lumMod val="60000"/>
-                            <a:lumOff val="40000"/>
-                          </a:schemeClr>
-                        </a:solidFill>
-                        <a:latin typeface="Cambria Math" panose="02040503050406030204" pitchFamily="18" charset="0"/>
-                      </a:rPr>
-                      <m:t>.</m:t>
-                    </m:r>
-                    <m:r>
-                      <a:rPr lang="ar-AE" sz="1600">
-                        <a:solidFill>
-                          <a:schemeClr val="accent6">
-                            <a:lumMod val="60000"/>
-                            <a:lumOff val="40000"/>
-                          </a:schemeClr>
-                        </a:solidFill>
-                        <a:latin typeface="Cambria Math" panose="02040503050406030204" pitchFamily="18" charset="0"/>
-                      </a:rPr>
-                      <m:t>01</m:t>
-                    </m:r>
-                  </m:oMath>
-                </a14:m>
-                <a:endParaRPr lang="en-US" sz="1600" dirty="0">
-                  <a:solidFill>
-                    <a:schemeClr val="accent6">
-                      <a:lumMod val="60000"/>
-                      <a:lumOff val="40000"/>
-                    </a:schemeClr>
-                  </a:solidFill>
-                </a:endParaRPr>
-              </a:p>
-              <a:p>
-                <a:endParaRPr lang="en-US" sz="1600" dirty="0">
-                  <a:solidFill>
-                    <a:schemeClr val="accent6">
-                      <a:lumMod val="60000"/>
-                      <a:lumOff val="40000"/>
-                    </a:schemeClr>
-                  </a:solidFill>
-                </a:endParaRPr>
-              </a:p>
-              <a:p>
-                <a:r>
-                  <a:rPr lang="en-US" sz="1600" dirty="0">
+                  <a:rPr lang="en-US" sz="2400" dirty="0">
                     <a:solidFill>
                       <a:schemeClr val="accent6">
                         <a:lumMod val="60000"/>
@@ -18645,7 +18309,7 @@
                   <a:t>2)  Here the evidence is the that the test is </a:t>
                 </a:r>
                 <a:r>
-                  <a:rPr lang="en-US" sz="1600" i="1" dirty="0">
+                  <a:rPr lang="en-US" sz="2400" i="1" dirty="0">
                     <a:solidFill>
                       <a:schemeClr val="accent6">
                         <a:lumMod val="60000"/>
@@ -18656,7 +18320,7 @@
                   <a:t>Positive.</a:t>
                 </a:r>
                 <a:r>
-                  <a:rPr lang="en-US" sz="1600" dirty="0">
+                  <a:rPr lang="en-US" sz="2400" dirty="0">
                     <a:solidFill>
                       <a:schemeClr val="accent6">
                         <a:lumMod val="60000"/>
@@ -18667,7 +18331,7 @@
                   <a:t> I have to determine P(D | </a:t>
                 </a:r>
                 <a:r>
-                  <a:rPr lang="en-US" sz="1600" i="1" dirty="0">
+                  <a:rPr lang="en-US" sz="2400" i="1" dirty="0">
                     <a:solidFill>
                       <a:schemeClr val="accent6">
                         <a:lumMod val="60000"/>
@@ -18678,7 +18342,7 @@
                   <a:t>Positive</a:t>
                 </a:r>
                 <a:r>
-                  <a:rPr lang="en-US" sz="1600" dirty="0">
+                  <a:rPr lang="en-US" sz="2400" dirty="0">
                     <a:solidFill>
                       <a:schemeClr val="accent6">
                         <a:lumMod val="60000"/>
@@ -18690,16 +18354,6 @@
                 </a:r>
               </a:p>
               <a:p>
-                <a:endParaRPr lang="en-US" sz="1600" dirty="0">
-                  <a:solidFill>
-                    <a:schemeClr val="accent6">
-                      <a:lumMod val="60000"/>
-                      <a:lumOff val="40000"/>
-                    </a:schemeClr>
-                  </a:solidFill>
-                </a:endParaRPr>
-              </a:p>
-              <a:p>
                 <a:pPr/>
                 <a14:m>
                   <m:oMathPara xmlns:m="http://schemas.openxmlformats.org/officeDocument/2006/math">
@@ -18708,7 +18362,7 @@
                     </m:oMathParaPr>
                     <m:oMath xmlns:m="http://schemas.openxmlformats.org/officeDocument/2006/math">
                       <m:r>
-                        <a:rPr lang="en-US" sz="1600" i="1">
+                        <a:rPr lang="en-US" sz="2400" i="1">
                           <a:solidFill>
                             <a:schemeClr val="accent6">
                               <a:lumMod val="60000"/>
@@ -18722,7 +18376,7 @@
                       <m:d>
                         <m:dPr>
                           <m:ctrlPr>
-                            <a:rPr lang="en-US" sz="1600" i="1">
+                            <a:rPr lang="en-US" sz="2400" i="1">
                               <a:solidFill>
                                 <a:schemeClr val="accent6">
                                   <a:lumMod val="60000"/>
@@ -18739,7 +18393,7 @@
                               <m:begChr m:val=""/>
                               <m:endChr m:val="|"/>
                               <m:ctrlPr>
-                                <a:rPr lang="en-US" sz="1600" i="1">
+                                <a:rPr lang="en-US" sz="2400" i="1">
                                   <a:solidFill>
                                     <a:schemeClr val="accent6">
                                       <a:lumMod val="60000"/>
@@ -18752,7 +18406,7 @@
                             </m:dPr>
                             <m:e>
                               <m:r>
-                                <a:rPr lang="en-US" sz="1600" b="0" i="1" smtClean="0">
+                                <a:rPr lang="en-US" sz="2400" b="0" i="1" smtClean="0">
                                   <a:solidFill>
                                     <a:schemeClr val="accent6">
                                       <a:lumMod val="60000"/>
@@ -18766,7 +18420,7 @@
                             </m:e>
                           </m:d>
                           <m:r>
-                            <a:rPr lang="en-US" sz="1600" b="0" i="1" smtClean="0">
+                            <a:rPr lang="en-US" sz="2400" b="0" i="1" smtClean="0">
                               <a:solidFill>
                                 <a:schemeClr val="accent6">
                                   <a:lumMod val="60000"/>
@@ -18780,7 +18434,7 @@
                         </m:e>
                       </m:d>
                       <m:r>
-                        <a:rPr lang="en-US" sz="1600">
+                        <a:rPr lang="en-US" sz="2400">
                           <a:solidFill>
                             <a:schemeClr val="accent6">
                               <a:lumMod val="60000"/>
@@ -18794,7 +18448,7 @@
                       <m:f>
                         <m:fPr>
                           <m:ctrlPr>
-                            <a:rPr lang="en-US" sz="1600" i="1">
+                            <a:rPr lang="en-US" sz="2400" i="1">
                               <a:solidFill>
                                 <a:schemeClr val="accent6">
                                   <a:lumMod val="60000"/>
@@ -18807,7 +18461,7 @@
                         </m:fPr>
                         <m:num>
                           <m:r>
-                            <a:rPr lang="en-US" sz="1600" i="1">
+                            <a:rPr lang="en-US" sz="2400" i="1">
                               <a:solidFill>
                                 <a:schemeClr val="accent6">
                                   <a:lumMod val="60000"/>
@@ -18821,7 +18475,7 @@
                           <m:d>
                             <m:dPr>
                               <m:ctrlPr>
-                                <a:rPr lang="en-US" sz="1600" i="1">
+                                <a:rPr lang="en-US" sz="2400" i="1">
                                   <a:solidFill>
                                     <a:schemeClr val="accent6">
                                       <a:lumMod val="60000"/>
@@ -18834,7 +18488,7 @@
                             </m:dPr>
                             <m:e>
                               <m:r>
-                                <a:rPr lang="en-US" sz="1600" b="0" i="1" smtClean="0">
+                                <a:rPr lang="en-US" sz="2400" b="0" i="1" smtClean="0">
                                   <a:solidFill>
                                     <a:schemeClr val="accent6">
                                       <a:lumMod val="60000"/>
@@ -18848,7 +18502,7 @@
                             </m:e>
                           </m:d>
                           <m:r>
-                            <a:rPr lang="en-US" sz="1600">
+                            <a:rPr lang="en-US" sz="2400">
                               <a:solidFill>
                                 <a:schemeClr val="accent6">
                                   <a:lumMod val="60000"/>
@@ -18860,7 +18514,7 @@
                             <m:t>×</m:t>
                           </m:r>
                           <m:r>
-                            <a:rPr lang="en-US" sz="1600" i="1">
+                            <a:rPr lang="en-US" sz="2400" i="1">
                               <a:solidFill>
                                 <a:schemeClr val="accent6">
                                   <a:lumMod val="60000"/>
@@ -18874,7 +18528,7 @@
                           <m:d>
                             <m:dPr>
                               <m:ctrlPr>
-                                <a:rPr lang="en-US" sz="1600" i="1">
+                                <a:rPr lang="en-US" sz="2400" i="1">
                                   <a:solidFill>
                                     <a:schemeClr val="accent6">
                                       <a:lumMod val="60000"/>
@@ -18891,7 +18545,7 @@
                                   <m:begChr m:val=""/>
                                   <m:endChr m:val="|"/>
                                   <m:ctrlPr>
-                                    <a:rPr lang="en-US" sz="1600" i="1">
+                                    <a:rPr lang="en-US" sz="2400" i="1">
                                       <a:solidFill>
                                         <a:schemeClr val="accent6">
                                           <a:lumMod val="60000"/>
@@ -18904,7 +18558,7 @@
                                 </m:dPr>
                                 <m:e>
                                   <m:r>
-                                    <a:rPr lang="en-US" sz="1600" b="0" i="1" smtClean="0">
+                                    <a:rPr lang="en-US" sz="2400" b="0" i="1" smtClean="0">
                                       <a:solidFill>
                                         <a:schemeClr val="accent6">
                                           <a:lumMod val="60000"/>
@@ -18918,7 +18572,7 @@
                                 </m:e>
                               </m:d>
                               <m:r>
-                                <a:rPr lang="en-US" sz="1600" b="0" i="1" smtClean="0">
+                                <a:rPr lang="en-US" sz="2400" b="0" i="1" smtClean="0">
                                   <a:solidFill>
                                     <a:schemeClr val="accent6">
                                       <a:lumMod val="60000"/>
@@ -18934,7 +18588,7 @@
                         </m:num>
                         <m:den>
                           <m:r>
-                            <a:rPr lang="en-US" sz="1600" i="1">
+                            <a:rPr lang="en-US" sz="2400" i="1">
                               <a:solidFill>
                                 <a:schemeClr val="accent6">
                                   <a:lumMod val="60000"/>
@@ -18948,7 +18602,7 @@
                           <m:d>
                             <m:dPr>
                               <m:ctrlPr>
-                                <a:rPr lang="en-US" sz="1600" i="1">
+                                <a:rPr lang="en-US" sz="2400" i="1">
                                   <a:solidFill>
                                     <a:schemeClr val="accent6">
                                       <a:lumMod val="60000"/>
@@ -18961,7 +18615,7 @@
                             </m:dPr>
                             <m:e>
                               <m:r>
-                                <a:rPr lang="en-US" sz="1600" i="1">
+                                <a:rPr lang="en-US" sz="2400" i="1">
                                   <a:solidFill>
                                     <a:schemeClr val="accent6">
                                       <a:lumMod val="60000"/>
@@ -18979,7 +18633,7 @@
                     </m:oMath>
                   </m:oMathPara>
                 </a14:m>
-                <a:endParaRPr lang="en-US" sz="1600" dirty="0">
+                <a:endParaRPr lang="en-US" sz="2400" dirty="0">
                   <a:solidFill>
                     <a:schemeClr val="accent6">
                       <a:lumMod val="60000"/>
@@ -18989,7 +18643,7 @@
                 </a:endParaRPr>
               </a:p>
               <a:p>
-                <a:endParaRPr lang="en-US" sz="1600" dirty="0">
+                <a:endParaRPr lang="en-US" sz="2400" dirty="0">
                   <a:solidFill>
                     <a:schemeClr val="accent6">
                       <a:lumMod val="60000"/>
@@ -19000,7 +18654,7 @@
               </a:p>
               <a:p>
                 <a:r>
-                  <a:rPr lang="en-US" sz="1600" dirty="0">
+                  <a:rPr lang="en-US" sz="2400" dirty="0">
                     <a:solidFill>
                       <a:schemeClr val="accent6">
                         <a:lumMod val="60000"/>
@@ -19012,7 +18666,7 @@
                 </a:r>
               </a:p>
               <a:p>
-                <a:endParaRPr lang="en-US" sz="1600" dirty="0">
+                <a:endParaRPr lang="en-US" sz="2400" dirty="0">
                   <a:solidFill>
                     <a:schemeClr val="accent6">
                       <a:lumMod val="60000"/>
@@ -19023,7 +18677,7 @@
               </a:p>
               <a:p>
                 <a:r>
-                  <a:rPr lang="en-US" sz="1600" dirty="0">
+                  <a:rPr lang="en-US" sz="2400" dirty="0">
                     <a:solidFill>
                       <a:schemeClr val="accent6">
                         <a:lumMod val="60000"/>
@@ -19038,7 +18692,7 @@
                     <m:sSup>
                       <m:sSupPr>
                         <m:ctrlPr>
-                          <a:rPr lang="en-US" sz="1600" i="1" dirty="0">
+                          <a:rPr lang="en-US" sz="2400" i="1" dirty="0">
                             <a:solidFill>
                               <a:schemeClr val="accent6">
                                 <a:lumMod val="60000"/>
@@ -19051,7 +18705,7 @@
                       </m:sSupPr>
                       <m:e>
                         <m:r>
-                          <a:rPr lang="en-US" sz="1600" i="1" dirty="0">
+                          <a:rPr lang="en-US" sz="2400" i="1" dirty="0">
                             <a:solidFill>
                               <a:schemeClr val="accent6">
                                 <a:lumMod val="60000"/>
@@ -19065,7 +18719,7 @@
                       </m:e>
                       <m:sup>
                         <m:r>
-                          <a:rPr lang="en-US" sz="1600" i="1" dirty="0">
+                          <a:rPr lang="en-US" sz="2400" i="1" dirty="0">
                             <a:solidFill>
                               <a:schemeClr val="accent6">
                                 <a:lumMod val="60000"/>
@@ -19081,7 +18735,7 @@
                   </m:oMath>
                 </a14:m>
                 <a:r>
-                  <a:rPr lang="en-US" sz="1600" dirty="0">
+                  <a:rPr lang="en-US" sz="2400" dirty="0">
                     <a:solidFill>
                       <a:schemeClr val="accent6">
                         <a:lumMod val="60000"/>
@@ -19096,7 +18750,7 @@
                     <m:sSup>
                       <m:sSupPr>
                         <m:ctrlPr>
-                          <a:rPr lang="en-US" sz="1600" i="1" dirty="0">
+                          <a:rPr lang="en-US" sz="2400" i="1" dirty="0">
                             <a:solidFill>
                               <a:schemeClr val="accent6">
                                 <a:lumMod val="60000"/>
@@ -19109,7 +18763,7 @@
                       </m:sSupPr>
                       <m:e>
                         <m:r>
-                          <a:rPr lang="en-US" sz="1600" i="1" dirty="0">
+                          <a:rPr lang="en-US" sz="2400" i="1" dirty="0">
                             <a:solidFill>
                               <a:schemeClr val="accent6">
                                 <a:lumMod val="60000"/>
@@ -19123,7 +18777,7 @@
                       </m:e>
                       <m:sup>
                         <m:r>
-                          <a:rPr lang="en-US" sz="1600" i="1" dirty="0">
+                          <a:rPr lang="en-US" sz="2400" i="1" dirty="0">
                             <a:solidFill>
                               <a:schemeClr val="accent6">
                                 <a:lumMod val="60000"/>
@@ -19139,7 +18793,7 @@
                   </m:oMath>
                 </a14:m>
                 <a:r>
-                  <a:rPr lang="en-US" sz="1600" dirty="0">
+                  <a:rPr lang="en-US" sz="2400" dirty="0">
                     <a:solidFill>
                       <a:schemeClr val="accent6">
                         <a:lumMod val="60000"/>
@@ -19152,7 +18806,7 @@
               </a:p>
               <a:p>
                 <a:r>
-                  <a:rPr lang="en-US" sz="1600" dirty="0">
+                  <a:rPr lang="en-US" sz="2400" dirty="0">
                     <a:solidFill>
                       <a:schemeClr val="accent6">
                         <a:lumMod val="60000"/>
@@ -19164,7 +18818,7 @@
                 </a:r>
               </a:p>
               <a:p>
-                <a:endParaRPr lang="en-US" sz="1600" dirty="0">
+                <a:endParaRPr lang="en-US" sz="2400" dirty="0">
                   <a:solidFill>
                     <a:schemeClr val="accent6">
                       <a:lumMod val="60000"/>
@@ -19185,7 +18839,7 @@
                         <m:rPr>
                           <m:nor/>
                         </m:rPr>
-                        <a:rPr lang="en-US" sz="1600" dirty="0">
+                        <a:rPr lang="en-US" sz="2400" dirty="0">
                           <a:solidFill>
                             <a:schemeClr val="accent6">
                               <a:lumMod val="60000"/>
@@ -19199,7 +18853,7 @@
                         <m:rPr>
                           <m:nor/>
                         </m:rPr>
-                        <a:rPr lang="en-US" sz="1600" dirty="0">
+                        <a:rPr lang="en-US" sz="2400" dirty="0">
                           <a:solidFill>
                             <a:schemeClr val="accent6">
                               <a:lumMod val="60000"/>
@@ -19213,7 +18867,7 @@
                         <m:rPr>
                           <m:nor/>
                         </m:rPr>
-                        <a:rPr lang="en-US" sz="1600" dirty="0">
+                        <a:rPr lang="en-US" sz="2400" dirty="0">
                           <a:solidFill>
                             <a:schemeClr val="accent6">
                               <a:lumMod val="60000"/>
@@ -19227,7 +18881,7 @@
                         <m:rPr>
                           <m:nor/>
                         </m:rPr>
-                        <a:rPr lang="en-US" sz="1600" dirty="0">
+                        <a:rPr lang="en-US" sz="2400" dirty="0">
                           <a:solidFill>
                             <a:schemeClr val="accent6">
                               <a:lumMod val="60000"/>
@@ -19241,7 +18895,7 @@
                         <m:rPr>
                           <m:nor/>
                         </m:rPr>
-                        <a:rPr lang="en-US" sz="1600" dirty="0">
+                        <a:rPr lang="en-US" sz="2400" dirty="0">
                           <a:solidFill>
                             <a:schemeClr val="accent6">
                               <a:lumMod val="60000"/>
@@ -19255,7 +18909,7 @@
                         <m:rPr>
                           <m:nor/>
                         </m:rPr>
-                        <a:rPr lang="en-US" sz="1600" dirty="0">
+                        <a:rPr lang="en-US" sz="2400" dirty="0">
                           <a:solidFill>
                             <a:schemeClr val="accent6">
                               <a:lumMod val="60000"/>
@@ -19269,7 +18923,7 @@
                         <m:rPr>
                           <m:nor/>
                         </m:rPr>
-                        <a:rPr lang="en-US" sz="1600" dirty="0">
+                        <a:rPr lang="en-US" sz="2400" dirty="0">
                           <a:solidFill>
                             <a:schemeClr val="accent6">
                               <a:lumMod val="60000"/>
@@ -19283,7 +18937,7 @@
                         <m:rPr>
                           <m:nor/>
                         </m:rPr>
-                        <a:rPr lang="en-US" sz="1600" dirty="0">
+                        <a:rPr lang="en-US" sz="2400" dirty="0">
                           <a:solidFill>
                             <a:schemeClr val="accent6">
                               <a:lumMod val="60000"/>
@@ -19297,7 +18951,7 @@
                         <m:rPr>
                           <m:nor/>
                         </m:rPr>
-                        <a:rPr lang="en-US" sz="1600" dirty="0">
+                        <a:rPr lang="en-US" sz="2400" dirty="0">
                           <a:solidFill>
                             <a:schemeClr val="accent6">
                               <a:lumMod val="60000"/>
@@ -19311,7 +18965,7 @@
                         <m:rPr>
                           <m:nor/>
                         </m:rPr>
-                        <a:rPr lang="en-US" sz="1600" dirty="0">
+                        <a:rPr lang="en-US" sz="2400" dirty="0">
                           <a:solidFill>
                             <a:schemeClr val="accent6">
                               <a:lumMod val="60000"/>
@@ -19325,7 +18979,7 @@
                         <m:rPr>
                           <m:nor/>
                         </m:rPr>
-                        <a:rPr lang="en-US" sz="1600" dirty="0">
+                        <a:rPr lang="en-US" sz="2400" dirty="0">
                           <a:solidFill>
                             <a:schemeClr val="accent6">
                               <a:lumMod val="60000"/>
@@ -19339,7 +18993,7 @@
                         <m:rPr>
                           <m:nor/>
                         </m:rPr>
-                        <a:rPr lang="en-US" sz="1600" b="0" i="0" dirty="0" smtClean="0">
+                        <a:rPr lang="en-US" sz="2400" b="0" i="0" dirty="0" smtClean="0">
                           <a:solidFill>
                             <a:schemeClr val="accent6">
                               <a:lumMod val="60000"/>
@@ -19350,7 +19004,7 @@
                         <m:t>:           </m:t>
                       </m:r>
                       <m:r>
-                        <a:rPr lang="en-US" sz="1600" i="1">
+                        <a:rPr lang="en-US" sz="2400" i="1">
                           <a:solidFill>
                             <a:schemeClr val="accent6">
                               <a:lumMod val="60000"/>
@@ -19364,7 +19018,7 @@
                       <m:d>
                         <m:dPr>
                           <m:ctrlPr>
-                            <a:rPr lang="en-US" sz="1600" i="1">
+                            <a:rPr lang="en-US" sz="2400" i="1">
                               <a:solidFill>
                                 <a:schemeClr val="accent6">
                                   <a:lumMod val="60000"/>
@@ -19381,7 +19035,7 @@
                               <m:begChr m:val=""/>
                               <m:endChr m:val="|"/>
                               <m:ctrlPr>
-                                <a:rPr lang="en-US" sz="1600" i="1">
+                                <a:rPr lang="en-US" sz="2400" i="1">
                                   <a:solidFill>
                                     <a:schemeClr val="accent6">
                                       <a:lumMod val="60000"/>
@@ -19394,7 +19048,7 @@
                             </m:dPr>
                             <m:e>
                               <m:r>
-                                <a:rPr lang="en-US" sz="1600" i="1">
+                                <a:rPr lang="en-US" sz="2400" i="1">
                                   <a:solidFill>
                                     <a:schemeClr val="accent6">
                                       <a:lumMod val="60000"/>
@@ -19408,7 +19062,7 @@
                             </m:e>
                           </m:d>
                           <m:r>
-                            <a:rPr lang="en-US" sz="1600" i="1">
+                            <a:rPr lang="en-US" sz="2400" i="1">
                               <a:solidFill>
                                 <a:schemeClr val="accent6">
                                   <a:lumMod val="60000"/>
@@ -19422,7 +19076,7 @@
                         </m:e>
                       </m:d>
                       <m:r>
-                        <a:rPr lang="en-US" sz="1600">
+                        <a:rPr lang="en-US" sz="2400">
                           <a:solidFill>
                             <a:schemeClr val="accent6">
                               <a:lumMod val="60000"/>
@@ -19436,7 +19090,7 @@
                       <m:f>
                         <m:fPr>
                           <m:ctrlPr>
-                            <a:rPr lang="en-US" sz="1600" i="1">
+                            <a:rPr lang="en-US" sz="2400" i="1">
                               <a:solidFill>
                                 <a:schemeClr val="accent6">
                                   <a:lumMod val="60000"/>
@@ -19449,7 +19103,7 @@
                         </m:fPr>
                         <m:num>
                           <m:r>
-                            <a:rPr lang="en-US" sz="1600" b="0" i="1" smtClean="0">
+                            <a:rPr lang="en-US" sz="2400" b="0" i="1" smtClean="0">
                               <a:solidFill>
                                 <a:schemeClr val="accent6">
                                   <a:lumMod val="60000"/>
@@ -19461,7 +19115,7 @@
                             <m:t>0</m:t>
                           </m:r>
                           <m:r>
-                            <a:rPr lang="en-US" sz="1600" b="0" i="1" smtClean="0">
+                            <a:rPr lang="en-US" sz="2400" b="0" i="1" smtClean="0">
                               <a:solidFill>
                                 <a:schemeClr val="accent6">
                                   <a:lumMod val="60000"/>
@@ -19473,7 +19127,7 @@
                             <m:t>.</m:t>
                           </m:r>
                           <m:r>
-                            <a:rPr lang="en-US" sz="1600" b="0" i="1" smtClean="0">
+                            <a:rPr lang="en-US" sz="2400" b="0" i="1" smtClean="0">
                               <a:solidFill>
                                 <a:schemeClr val="accent6">
                                   <a:lumMod val="60000"/>
@@ -19485,7 +19139,7 @@
                             <m:t>0</m:t>
                           </m:r>
                           <m:r>
-                            <a:rPr lang="en-US" sz="1600" b="0" i="0" smtClean="0">
+                            <a:rPr lang="en-US" sz="2400" b="0" i="0" smtClean="0">
                               <a:solidFill>
                                 <a:schemeClr val="accent6">
                                   <a:lumMod val="60000"/>
@@ -19497,7 +19151,7 @@
                             <m:t>1</m:t>
                           </m:r>
                           <m:r>
-                            <a:rPr lang="en-US" sz="1600">
+                            <a:rPr lang="en-US" sz="2400">
                               <a:solidFill>
                                 <a:schemeClr val="accent6">
                                   <a:lumMod val="60000"/>
@@ -19509,7 +19163,7 @@
                             <m:t>×</m:t>
                           </m:r>
                           <m:r>
-                            <a:rPr lang="en-US" sz="1600" b="0" i="1" smtClean="0">
+                            <a:rPr lang="en-US" sz="2400" b="0" i="1" smtClean="0">
                               <a:solidFill>
                                 <a:schemeClr val="accent6">
                                   <a:lumMod val="60000"/>
@@ -19521,7 +19175,7 @@
                             <m:t>0</m:t>
                           </m:r>
                           <m:r>
-                            <a:rPr lang="en-US" sz="1600" b="0" i="1" smtClean="0">
+                            <a:rPr lang="en-US" sz="2400" b="0" i="1" smtClean="0">
                               <a:solidFill>
                                 <a:schemeClr val="accent6">
                                   <a:lumMod val="60000"/>
@@ -19533,7 +19187,7 @@
                             <m:t>.</m:t>
                           </m:r>
                           <m:r>
-                            <a:rPr lang="en-US" sz="1600" b="0" i="1" smtClean="0">
+                            <a:rPr lang="en-US" sz="2400" b="0" i="1" smtClean="0">
                               <a:solidFill>
                                 <a:schemeClr val="accent6">
                                   <a:lumMod val="60000"/>
@@ -19547,7 +19201,7 @@
                         </m:num>
                         <m:den>
                           <m:r>
-                            <a:rPr lang="en-US" sz="1600" b="0" i="1" smtClean="0">
+                            <a:rPr lang="en-US" sz="2400" b="0" i="1" smtClean="0">
                               <a:solidFill>
                                 <a:schemeClr val="accent6">
                                   <a:lumMod val="60000"/>
@@ -19559,7 +19213,7 @@
                             <m:t>0</m:t>
                           </m:r>
                           <m:r>
-                            <a:rPr lang="en-US" sz="1600" b="0" i="1" smtClean="0">
+                            <a:rPr lang="en-US" sz="2400" b="0" i="1" smtClean="0">
                               <a:solidFill>
                                 <a:schemeClr val="accent6">
                                   <a:lumMod val="60000"/>
@@ -19571,7 +19225,7 @@
                             <m:t>.</m:t>
                           </m:r>
                           <m:r>
-                            <a:rPr lang="en-US" sz="1600" b="0" i="1" smtClean="0">
+                            <a:rPr lang="en-US" sz="2400" b="0" i="1" smtClean="0">
                               <a:solidFill>
                                 <a:schemeClr val="accent6">
                                   <a:lumMod val="60000"/>
@@ -19585,7 +19239,7 @@
                         </m:den>
                       </m:f>
                       <m:r>
-                        <a:rPr lang="en-US" sz="1600" b="0" i="1" smtClean="0">
+                        <a:rPr lang="en-US" sz="2400" b="0" i="1" smtClean="0">
                           <a:solidFill>
                             <a:schemeClr val="accent6">
                               <a:lumMod val="60000"/>
@@ -19597,7 +19251,7 @@
                         <m:t>=</m:t>
                       </m:r>
                       <m:r>
-                        <a:rPr lang="en-US" sz="1600" b="0" i="1" smtClean="0">
+                        <a:rPr lang="en-US" sz="2400" b="0" i="1" smtClean="0">
                           <a:solidFill>
                             <a:schemeClr val="accent6">
                               <a:lumMod val="60000"/>
@@ -19609,7 +19263,7 @@
                         <m:t>0</m:t>
                       </m:r>
                       <m:r>
-                        <a:rPr lang="en-US" sz="1600" b="0" i="1" smtClean="0">
+                        <a:rPr lang="en-US" sz="2400" b="0" i="1" smtClean="0">
                           <a:solidFill>
                             <a:schemeClr val="accent6">
                               <a:lumMod val="60000"/>
@@ -19621,7 +19275,7 @@
                         <m:t>.</m:t>
                       </m:r>
                       <m:r>
-                        <a:rPr lang="en-US" sz="1600" b="0" i="1" smtClean="0">
+                        <a:rPr lang="en-US" sz="2400" b="0" i="1" smtClean="0">
                           <a:solidFill>
                             <a:schemeClr val="accent6">
                               <a:lumMod val="60000"/>
@@ -19635,7 +19289,7 @@
                     </m:oMath>
                   </m:oMathPara>
                 </a14:m>
-                <a:endParaRPr lang="en-US" sz="1600" dirty="0">
+                <a:endParaRPr lang="en-US" sz="2400" dirty="0">
                   <a:solidFill>
                     <a:schemeClr val="accent6">
                       <a:lumMod val="60000"/>
@@ -19646,7 +19300,7 @@
               </a:p>
               <a:p>
                 <a:r>
-                  <a:rPr lang="en-US" sz="1600" dirty="0">
+                  <a:rPr lang="en-US" sz="2400" dirty="0">
                     <a:solidFill>
                       <a:schemeClr val="accent6">
                         <a:lumMod val="60000"/>
@@ -19659,7 +19313,7 @@
               </a:p>
               <a:p>
                 <a:r>
-                  <a:rPr lang="en-US" sz="1600" dirty="0">
+                  <a:rPr lang="en-US" sz="2400" dirty="0">
                     <a:solidFill>
                       <a:schemeClr val="accent6">
                         <a:lumMod val="60000"/>
@@ -19673,7 +19327,7 @@
             </p:txBody>
           </p:sp>
         </mc:Choice>
-        <mc:Fallback xmlns="">
+        <mc:Fallback>
           <p:sp>
             <p:nvSpPr>
               <p:cNvPr id="7" name="TextBox 6">
@@ -19690,8 +19344,8 @@
             </p:nvSpPr>
             <p:spPr>
               <a:xfrm>
-                <a:off x="243840" y="698066"/>
-                <a:ext cx="10043160" cy="6239978"/>
+                <a:off x="110533" y="284684"/>
+                <a:ext cx="11378184" cy="6727034"/>
               </a:xfrm>
               <a:prstGeom prst="rect">
                 <a:avLst/>
@@ -19699,410 +19353,7 @@
               <a:blipFill>
                 <a:blip r:embed="rId3"/>
                 <a:stretch>
-                  <a:fillRect l="-303" t="-293" b="-391"/>
-                </a:stretch>
-              </a:blipFill>
-            </p:spPr>
-            <p:txBody>
-              <a:bodyPr/>
-              <a:lstStyle/>
-              <a:p>
-                <a:r>
-                  <a:rPr lang="en-US">
-                    <a:noFill/>
-                  </a:rPr>
-                  <a:t> </a:t>
-                </a:r>
-              </a:p>
-            </p:txBody>
-          </p:sp>
-        </mc:Fallback>
-      </mc:AlternateContent>
-      <p:sp>
-        <p:nvSpPr>
-          <p:cNvPr id="5" name="Title 1">
-            <a:extLst>
-              <a:ext uri="{FF2B5EF4-FFF2-40B4-BE49-F238E27FC236}">
-                <a16:creationId xmlns:a16="http://schemas.microsoft.com/office/drawing/2014/main" id="{A4D2A73B-6312-30C8-C59B-E034E4EA017E}"/>
-              </a:ext>
-            </a:extLst>
-          </p:cNvPr>
-          <p:cNvSpPr>
-            <a:spLocks noGrp="1"/>
-          </p:cNvSpPr>
-          <p:nvPr>
-            <p:ph type="title"/>
-          </p:nvPr>
-        </p:nvSpPr>
-        <p:spPr>
-          <a:xfrm>
-            <a:off x="838200" y="137985"/>
-            <a:ext cx="10515600" cy="465519"/>
-          </a:xfrm>
-        </p:spPr>
-        <p:txBody>
-          <a:bodyPr>
-            <a:noAutofit/>
-          </a:bodyPr>
-          <a:lstStyle/>
-          <a:p>
-            <a:pPr algn="ctr"/>
-            <a:r>
-              <a:rPr lang="en-US" sz="3200" b="1" dirty="0"/>
-              <a:t>Bayes Theorem</a:t>
-            </a:r>
-            <a:endParaRPr lang="en-US" sz="3200" dirty="0"/>
-          </a:p>
-        </p:txBody>
-      </p:sp>
-      <mc:AlternateContent xmlns:mc="http://schemas.openxmlformats.org/markup-compatibility/2006" xmlns:a14="http://schemas.microsoft.com/office/drawing/2010/main">
-        <mc:Choice Requires="a14">
-          <p:sp>
-            <p:nvSpPr>
-              <p:cNvPr id="10" name="TextBox 9">
-                <a:extLst>
-                  <a:ext uri="{FF2B5EF4-FFF2-40B4-BE49-F238E27FC236}">
-                    <a16:creationId xmlns:a16="http://schemas.microsoft.com/office/drawing/2014/main" id="{E1204452-5C5C-023A-FC04-0A3FA0E84E2B}"/>
-                  </a:ext>
-                </a:extLst>
-              </p:cNvPr>
-              <p:cNvSpPr txBox="1"/>
-              <p:nvPr/>
-            </p:nvSpPr>
-            <p:spPr>
-              <a:xfrm>
-                <a:off x="8257032" y="86868"/>
-                <a:ext cx="2602187" cy="583493"/>
-              </a:xfrm>
-              <a:prstGeom prst="rect">
-                <a:avLst/>
-              </a:prstGeom>
-              <a:noFill/>
-            </p:spPr>
-            <p:txBody>
-              <a:bodyPr wrap="none" lIns="0" tIns="0" rIns="0" bIns="0" rtlCol="0">
-                <a:spAutoFit/>
-              </a:bodyPr>
-              <a:lstStyle/>
-              <a:p>
-                <a:pPr/>
-                <a14:m>
-                  <m:oMathPara xmlns:m="http://schemas.openxmlformats.org/officeDocument/2006/math">
-                    <m:oMathParaPr>
-                      <m:jc m:val="centerGroup"/>
-                    </m:oMathParaPr>
-                    <m:oMath xmlns:m="http://schemas.openxmlformats.org/officeDocument/2006/math">
-                      <m:r>
-                        <a:rPr lang="en-US" i="1" smtClean="0">
-                          <a:solidFill>
-                            <a:schemeClr val="accent6">
-                              <a:lumMod val="60000"/>
-                              <a:lumOff val="40000"/>
-                            </a:schemeClr>
-                          </a:solidFill>
-                          <a:latin typeface="Cambria Math" panose="02040503050406030204" pitchFamily="18" charset="0"/>
-                        </a:rPr>
-                        <m:t>𝑃</m:t>
-                      </m:r>
-                      <m:d>
-                        <m:dPr>
-                          <m:ctrlPr>
-                            <a:rPr lang="en-US" i="1">
-                              <a:solidFill>
-                                <a:schemeClr val="accent6">
-                                  <a:lumMod val="60000"/>
-                                  <a:lumOff val="40000"/>
-                                </a:schemeClr>
-                              </a:solidFill>
-                              <a:latin typeface="Cambria Math" panose="02040503050406030204" pitchFamily="18" charset="0"/>
-                            </a:rPr>
-                          </m:ctrlPr>
-                        </m:dPr>
-                        <m:e>
-                          <m:d>
-                            <m:dPr>
-                              <m:begChr m:val=""/>
-                              <m:endChr m:val="|"/>
-                              <m:ctrlPr>
-                                <a:rPr lang="en-US" i="1">
-                                  <a:solidFill>
-                                    <a:schemeClr val="accent6">
-                                      <a:lumMod val="60000"/>
-                                      <a:lumOff val="40000"/>
-                                    </a:schemeClr>
-                                  </a:solidFill>
-                                  <a:latin typeface="Cambria Math" panose="02040503050406030204" pitchFamily="18" charset="0"/>
-                                </a:rPr>
-                              </m:ctrlPr>
-                            </m:dPr>
-                            <m:e>
-                              <m:r>
-                                <a:rPr lang="en-US" i="1">
-                                  <a:solidFill>
-                                    <a:schemeClr val="accent6">
-                                      <a:lumMod val="60000"/>
-                                      <a:lumOff val="40000"/>
-                                    </a:schemeClr>
-                                  </a:solidFill>
-                                  <a:latin typeface="Cambria Math" panose="02040503050406030204" pitchFamily="18" charset="0"/>
-                                </a:rPr>
-                                <m:t>𝐴</m:t>
-                              </m:r>
-                            </m:e>
-                          </m:d>
-                          <m:r>
-                            <a:rPr lang="en-US" i="1">
-                              <a:solidFill>
-                                <a:schemeClr val="accent6">
-                                  <a:lumMod val="60000"/>
-                                  <a:lumOff val="40000"/>
-                                </a:schemeClr>
-                              </a:solidFill>
-                              <a:latin typeface="Cambria Math" panose="02040503050406030204" pitchFamily="18" charset="0"/>
-                            </a:rPr>
-                            <m:t>𝐸</m:t>
-                          </m:r>
-                        </m:e>
-                      </m:d>
-                      <m:r>
-                        <a:rPr lang="en-US" i="0">
-                          <a:solidFill>
-                            <a:schemeClr val="accent6">
-                              <a:lumMod val="60000"/>
-                              <a:lumOff val="40000"/>
-                            </a:schemeClr>
-                          </a:solidFill>
-                          <a:latin typeface="Cambria Math" panose="02040503050406030204" pitchFamily="18" charset="0"/>
-                        </a:rPr>
-                        <m:t>=</m:t>
-                      </m:r>
-                      <m:f>
-                        <m:fPr>
-                          <m:ctrlPr>
-                            <a:rPr lang="en-US" i="1">
-                              <a:solidFill>
-                                <a:schemeClr val="accent6">
-                                  <a:lumMod val="60000"/>
-                                  <a:lumOff val="40000"/>
-                                </a:schemeClr>
-                              </a:solidFill>
-                              <a:latin typeface="Cambria Math" panose="02040503050406030204" pitchFamily="18" charset="0"/>
-                            </a:rPr>
-                          </m:ctrlPr>
-                        </m:fPr>
-                        <m:num>
-                          <m:r>
-                            <a:rPr lang="en-US" i="1">
-                              <a:solidFill>
-                                <a:schemeClr val="accent6">
-                                  <a:lumMod val="60000"/>
-                                  <a:lumOff val="40000"/>
-                                </a:schemeClr>
-                              </a:solidFill>
-                              <a:latin typeface="Cambria Math" panose="02040503050406030204" pitchFamily="18" charset="0"/>
-                            </a:rPr>
-                            <m:t>𝑃</m:t>
-                          </m:r>
-                          <m:d>
-                            <m:dPr>
-                              <m:ctrlPr>
-                                <a:rPr lang="en-US" i="1">
-                                  <a:solidFill>
-                                    <a:schemeClr val="accent6">
-                                      <a:lumMod val="60000"/>
-                                      <a:lumOff val="40000"/>
-                                    </a:schemeClr>
-                                  </a:solidFill>
-                                  <a:latin typeface="Cambria Math" panose="02040503050406030204" pitchFamily="18" charset="0"/>
-                                </a:rPr>
-                              </m:ctrlPr>
-                            </m:dPr>
-                            <m:e>
-                              <m:r>
-                                <a:rPr lang="en-US" b="0" i="1" smtClean="0">
-                                  <a:solidFill>
-                                    <a:schemeClr val="accent6">
-                                      <a:lumMod val="60000"/>
-                                      <a:lumOff val="40000"/>
-                                    </a:schemeClr>
-                                  </a:solidFill>
-                                  <a:latin typeface="Cambria Math" panose="02040503050406030204" pitchFamily="18" charset="0"/>
-                                </a:rPr>
-                                <m:t>𝐴</m:t>
-                              </m:r>
-                            </m:e>
-                          </m:d>
-                          <m:r>
-                            <a:rPr lang="en-US" i="0">
-                              <a:solidFill>
-                                <a:schemeClr val="accent6">
-                                  <a:lumMod val="60000"/>
-                                  <a:lumOff val="40000"/>
-                                </a:schemeClr>
-                              </a:solidFill>
-                              <a:latin typeface="Cambria Math" panose="02040503050406030204" pitchFamily="18" charset="0"/>
-                            </a:rPr>
-                            <m:t>×</m:t>
-                          </m:r>
-                          <m:r>
-                            <a:rPr lang="en-US" i="1">
-                              <a:solidFill>
-                                <a:schemeClr val="accent6">
-                                  <a:lumMod val="60000"/>
-                                  <a:lumOff val="40000"/>
-                                </a:schemeClr>
-                              </a:solidFill>
-                              <a:latin typeface="Cambria Math" panose="02040503050406030204" pitchFamily="18" charset="0"/>
-                            </a:rPr>
-                            <m:t>𝑃</m:t>
-                          </m:r>
-                          <m:d>
-                            <m:dPr>
-                              <m:ctrlPr>
-                                <a:rPr lang="en-US" i="1">
-                                  <a:solidFill>
-                                    <a:schemeClr val="accent6">
-                                      <a:lumMod val="60000"/>
-                                      <a:lumOff val="40000"/>
-                                    </a:schemeClr>
-                                  </a:solidFill>
-                                  <a:latin typeface="Cambria Math" panose="02040503050406030204" pitchFamily="18" charset="0"/>
-                                </a:rPr>
-                              </m:ctrlPr>
-                            </m:dPr>
-                            <m:e>
-                              <m:d>
-                                <m:dPr>
-                                  <m:begChr m:val=""/>
-                                  <m:endChr m:val="|"/>
-                                  <m:ctrlPr>
-                                    <a:rPr lang="en-US" i="1">
-                                      <a:solidFill>
-                                        <a:schemeClr val="accent6">
-                                          <a:lumMod val="60000"/>
-                                          <a:lumOff val="40000"/>
-                                        </a:schemeClr>
-                                      </a:solidFill>
-                                      <a:latin typeface="Cambria Math" panose="02040503050406030204" pitchFamily="18" charset="0"/>
-                                    </a:rPr>
-                                  </m:ctrlPr>
-                                </m:dPr>
-                                <m:e>
-                                  <m:r>
-                                    <a:rPr lang="en-US" i="1">
-                                      <a:solidFill>
-                                        <a:schemeClr val="accent6">
-                                          <a:lumMod val="60000"/>
-                                          <a:lumOff val="40000"/>
-                                        </a:schemeClr>
-                                      </a:solidFill>
-                                      <a:latin typeface="Cambria Math" panose="02040503050406030204" pitchFamily="18" charset="0"/>
-                                    </a:rPr>
-                                    <m:t>𝐸</m:t>
-                                  </m:r>
-                                </m:e>
-                              </m:d>
-                              <m:r>
-                                <a:rPr lang="en-US" i="1">
-                                  <a:solidFill>
-                                    <a:schemeClr val="accent6">
-                                      <a:lumMod val="60000"/>
-                                      <a:lumOff val="40000"/>
-                                    </a:schemeClr>
-                                  </a:solidFill>
-                                  <a:latin typeface="Cambria Math" panose="02040503050406030204" pitchFamily="18" charset="0"/>
-                                </a:rPr>
-                                <m:t>𝐴</m:t>
-                              </m:r>
-                            </m:e>
-                          </m:d>
-                        </m:num>
-                        <m:den>
-                          <m:r>
-                            <a:rPr lang="en-US" i="1">
-                              <a:solidFill>
-                                <a:schemeClr val="accent6">
-                                  <a:lumMod val="60000"/>
-                                  <a:lumOff val="40000"/>
-                                </a:schemeClr>
-                              </a:solidFill>
-                              <a:latin typeface="Cambria Math" panose="02040503050406030204" pitchFamily="18" charset="0"/>
-                            </a:rPr>
-                            <m:t>𝑃</m:t>
-                          </m:r>
-                          <m:d>
-                            <m:dPr>
-                              <m:ctrlPr>
-                                <a:rPr lang="en-US" i="1">
-                                  <a:solidFill>
-                                    <a:schemeClr val="accent6">
-                                      <a:lumMod val="60000"/>
-                                      <a:lumOff val="40000"/>
-                                    </a:schemeClr>
-                                  </a:solidFill>
-                                  <a:latin typeface="Cambria Math" panose="02040503050406030204" pitchFamily="18" charset="0"/>
-                                </a:rPr>
-                              </m:ctrlPr>
-                            </m:dPr>
-                            <m:e>
-                              <m:r>
-                                <a:rPr lang="en-US" b="0" i="1" smtClean="0">
-                                  <a:solidFill>
-                                    <a:schemeClr val="accent6">
-                                      <a:lumMod val="60000"/>
-                                      <a:lumOff val="40000"/>
-                                    </a:schemeClr>
-                                  </a:solidFill>
-                                  <a:latin typeface="Cambria Math" panose="02040503050406030204" pitchFamily="18" charset="0"/>
-                                </a:rPr>
-                                <m:t>𝐸</m:t>
-                              </m:r>
-                            </m:e>
-                          </m:d>
-                        </m:den>
-                      </m:f>
-                    </m:oMath>
-                  </m:oMathPara>
-                </a14:m>
-                <a:endParaRPr lang="en-US" dirty="0">
-                  <a:solidFill>
-                    <a:schemeClr val="accent6">
-                      <a:lumMod val="60000"/>
-                      <a:lumOff val="40000"/>
-                    </a:schemeClr>
-                  </a:solidFill>
-                </a:endParaRPr>
-              </a:p>
-            </p:txBody>
-          </p:sp>
-        </mc:Choice>
-        <mc:Fallback xmlns="">
-          <p:sp>
-            <p:nvSpPr>
-              <p:cNvPr id="10" name="TextBox 9">
-                <a:extLst>
-                  <a:ext uri="{FF2B5EF4-FFF2-40B4-BE49-F238E27FC236}">
-                    <a16:creationId xmlns:a16="http://schemas.microsoft.com/office/drawing/2014/main" id="{E1204452-5C5C-023A-FC04-0A3FA0E84E2B}"/>
-                  </a:ext>
-                </a:extLst>
-              </p:cNvPr>
-              <p:cNvSpPr txBox="1">
-                <a:spLocks noRot="1" noChangeAspect="1" noMove="1" noResize="1" noEditPoints="1" noAdjustHandles="1" noChangeArrowheads="1" noChangeShapeType="1" noTextEdit="1"/>
-              </p:cNvSpPr>
-              <p:nvPr/>
-            </p:nvSpPr>
-            <p:spPr>
-              <a:xfrm>
-                <a:off x="8257032" y="86868"/>
-                <a:ext cx="2602187" cy="583493"/>
-              </a:xfrm>
-              <a:prstGeom prst="rect">
-                <a:avLst/>
-              </a:prstGeom>
-              <a:blipFill>
-                <a:blip r:embed="rId4"/>
-                <a:stretch>
-                  <a:fillRect/>
+                  <a:fillRect l="-803" t="-725" b="-1179"/>
                 </a:stretch>
               </a:blipFill>
             </p:spPr>
@@ -20136,7 +19387,7 @@
           <p:nvPr/>
         </p:nvPicPr>
         <p:blipFill>
-          <a:blip r:embed="rId5"/>
+          <a:blip r:embed="rId4"/>
           <a:stretch>
             <a:fillRect/>
           </a:stretch>
